--- a/slides/release/05__inter-1-producer-internals.pptx
+++ b/slides/release/05__inter-1-producer-internals.pptx
@@ -5,28 +5,28 @@
     <p:sldMasterId id="2147483651" r:id="rId1"/>
   </p:sldMasterIdLst>
   <p:notesMasterIdLst>
-    <p:notesMasterId r:id="rId2"/>
+    <p:notesMasterId r:id="rId18"/>
   </p:notesMasterIdLst>
   <p:handoutMasterIdLst>
-    <p:handoutMasterId r:id="rId3"/>
+    <p:handoutMasterId r:id="rId19"/>
   </p:handoutMasterIdLst>
   <p:sldIdLst>
-    <p:sldId id="256" r:id="rId9"/>
-    <p:sldId id="257" r:id="rId10"/>
-    <p:sldId id="258" r:id="rId11"/>
-    <p:sldId id="259" r:id="rId12"/>
-    <p:sldId id="260" r:id="rId13"/>
-    <p:sldId id="261" r:id="rId14"/>
-    <p:sldId id="262" r:id="rId15"/>
-    <p:sldId id="263" r:id="rId16"/>
-    <p:sldId id="264" r:id="rId17"/>
-    <p:sldId id="265" r:id="rId18"/>
-    <p:sldId id="266" r:id="rId19"/>
-    <p:sldId id="267" r:id="rId20"/>
-    <p:sldId id="268" r:id="rId21"/>
-    <p:sldId id="269" r:id="rId22"/>
-    <p:sldId id="270" r:id="rId23"/>
-    <p:sldId id="271" r:id="rId24"/>
+    <p:sldId id="256" r:id="rId2"/>
+    <p:sldId id="257" r:id="rId3"/>
+    <p:sldId id="258" r:id="rId4"/>
+    <p:sldId id="259" r:id="rId5"/>
+    <p:sldId id="260" r:id="rId6"/>
+    <p:sldId id="261" r:id="rId7"/>
+    <p:sldId id="262" r:id="rId8"/>
+    <p:sldId id="263" r:id="rId9"/>
+    <p:sldId id="264" r:id="rId10"/>
+    <p:sldId id="265" r:id="rId11"/>
+    <p:sldId id="266" r:id="rId12"/>
+    <p:sldId id="267" r:id="rId13"/>
+    <p:sldId id="268" r:id="rId14"/>
+    <p:sldId id="269" r:id="rId15"/>
+    <p:sldId id="270" r:id="rId16"/>
+    <p:sldId id="271" r:id="rId17"/>
   </p:sldIdLst>
   <p:sldSz cx="9372600" cy="8297863"/>
   <p:notesSz cx="7315200" cy="9601200"/>
@@ -194,9 +194,7 @@
   <p:cmAuthor id="2" name="Mark Kerzner" initials="MK" lastIdx="6" clrIdx="1"/>
   <p:cmAuthor id="3" name="Mary Beth Conlee" initials="MBC" lastIdx="7" clrIdx="2"/>
   <p:cmAuthor id="4" name="Michelle" initials="M" lastIdx="5" clrIdx="3"/>
-  <p:cmAuthor id="5" name="Tricia Murphy" initials="TM" lastIdx="4" clrIdx="4">
-    <p:extLst/>
-  </p:cmAuthor>
+  <p:cmAuthor id="5" name="Tricia Murphy" initials="TM" lastIdx="4" clrIdx="4"/>
 </p:cmAuthorLst>
 </file>
 
@@ -766,7 +764,7 @@
 </file>
 
 <file path=ppt/notesSlides/notesSlide1.xml><?xml version="1.0" encoding="utf-8"?>
-<p:notes xmlns:a="http://schemas.openxmlformats.org/drawingml/2006/main" xmlns:p="http://schemas.openxmlformats.org/presentationml/2006/main" xmlns:r="http://schemas.openxmlformats.org/officeDocument/2006/relationships">
+<p:notes xmlns:a="http://schemas.openxmlformats.org/drawingml/2006/main" xmlns:r="http://schemas.openxmlformats.org/officeDocument/2006/relationships" xmlns:p="http://schemas.openxmlformats.org/presentationml/2006/main">
   <p:cSld>
     <p:spTree>
       <p:nvGrpSpPr>
@@ -786,34 +784,34 @@
         <p:nvSpPr>
           <p:cNvPr id="2" name="Slide Image Placeholder 1"/>
           <p:cNvSpPr>
+            <a:spLocks noGrp="1" noRot="1" noChangeAspect="1"/>
+          </p:cNvSpPr>
+          <p:nvPr>
+            <p:ph type="sldImg" idx="2"/>
+          </p:nvPr>
+        </p:nvSpPr>
+        <p:spPr/>
+      </p:sp>
+      <p:sp>
+        <p:nvSpPr>
+          <p:cNvPr id="3" name="Slide Number Placeholder 2"/>
+          <p:cNvSpPr>
             <a:spLocks noGrp="1"/>
           </p:cNvSpPr>
           <p:nvPr>
-            <p:ph type="sldImg" idx="2"/>
+            <p:ph type="sldNum" sz="quarter" idx="5"/>
           </p:nvPr>
         </p:nvSpPr>
         <p:spPr/>
       </p:sp>
       <p:sp>
         <p:nvSpPr>
-          <p:cNvPr id="3" name="Slide Number Placeholder 2"/>
+          <p:cNvPr id="4" name="Notes Placeholder 3"/>
           <p:cNvSpPr>
             <a:spLocks noGrp="1"/>
           </p:cNvSpPr>
           <p:nvPr>
-            <p:ph type="sldNum" idx="5" sz="quarter"/>
-          </p:nvPr>
-        </p:nvSpPr>
-        <p:spPr/>
-      </p:sp>
-      <p:sp>
-        <p:nvSpPr>
-          <p:cNvPr id="4" name="Notes Placeholder 3"/>
-          <p:cNvSpPr>
-            <a:spLocks noGrp="1"/>
-          </p:cNvSpPr>
-          <p:nvPr>
-            <p:ph type="body" idx="3" sz="quarter"/>
+            <p:ph type="body" sz="quarter" idx="3"/>
           </p:nvPr>
         </p:nvSpPr>
         <p:spPr/>
@@ -836,7 +834,7 @@
 </file>
 
 <file path=ppt/notesSlides/notesSlide2.xml><?xml version="1.0" encoding="utf-8"?>
-<p:notes xmlns:a="http://schemas.openxmlformats.org/drawingml/2006/main" xmlns:p="http://schemas.openxmlformats.org/presentationml/2006/main" xmlns:r="http://schemas.openxmlformats.org/officeDocument/2006/relationships">
+<p:notes xmlns:a="http://schemas.openxmlformats.org/drawingml/2006/main" xmlns:r="http://schemas.openxmlformats.org/officeDocument/2006/relationships" xmlns:p="http://schemas.openxmlformats.org/presentationml/2006/main">
   <p:cSld>
     <p:spTree>
       <p:nvGrpSpPr>
@@ -856,34 +854,34 @@
         <p:nvSpPr>
           <p:cNvPr id="2" name="Slide Image Placeholder 1"/>
           <p:cNvSpPr>
+            <a:spLocks noGrp="1" noRot="1" noChangeAspect="1"/>
+          </p:cNvSpPr>
+          <p:nvPr>
+            <p:ph type="sldImg" idx="2"/>
+          </p:nvPr>
+        </p:nvSpPr>
+        <p:spPr/>
+      </p:sp>
+      <p:sp>
+        <p:nvSpPr>
+          <p:cNvPr id="3" name="Slide Number Placeholder 2"/>
+          <p:cNvSpPr>
             <a:spLocks noGrp="1"/>
           </p:cNvSpPr>
           <p:nvPr>
-            <p:ph type="sldImg" idx="2"/>
+            <p:ph type="sldNum" sz="quarter" idx="5"/>
           </p:nvPr>
         </p:nvSpPr>
         <p:spPr/>
       </p:sp>
       <p:sp>
         <p:nvSpPr>
-          <p:cNvPr id="3" name="Slide Number Placeholder 2"/>
+          <p:cNvPr id="4" name="Notes Placeholder 3"/>
           <p:cNvSpPr>
             <a:spLocks noGrp="1"/>
           </p:cNvSpPr>
           <p:nvPr>
-            <p:ph type="sldNum" idx="5" sz="quarter"/>
-          </p:nvPr>
-        </p:nvSpPr>
-        <p:spPr/>
-      </p:sp>
-      <p:sp>
-        <p:nvSpPr>
-          <p:cNvPr id="4" name="Notes Placeholder 3"/>
-          <p:cNvSpPr>
-            <a:spLocks noGrp="1"/>
-          </p:cNvSpPr>
-          <p:nvPr>
-            <p:ph type="body" idx="3" sz="quarter"/>
+            <p:ph type="body" sz="quarter" idx="3"/>
           </p:nvPr>
         </p:nvSpPr>
         <p:spPr/>
@@ -931,7 +929,7 @@
 </file>
 
 <file path=ppt/notesSlides/notesSlide3.xml><?xml version="1.0" encoding="utf-8"?>
-<p:notes xmlns:a="http://schemas.openxmlformats.org/drawingml/2006/main" xmlns:p="http://schemas.openxmlformats.org/presentationml/2006/main" xmlns:r="http://schemas.openxmlformats.org/officeDocument/2006/relationships">
+<p:notes xmlns:a="http://schemas.openxmlformats.org/drawingml/2006/main" xmlns:r="http://schemas.openxmlformats.org/officeDocument/2006/relationships" xmlns:p="http://schemas.openxmlformats.org/presentationml/2006/main">
   <p:cSld>
     <p:spTree>
       <p:nvGrpSpPr>
@@ -951,34 +949,34 @@
         <p:nvSpPr>
           <p:cNvPr id="2" name="Slide Image Placeholder 1"/>
           <p:cNvSpPr>
+            <a:spLocks noGrp="1" noRot="1" noChangeAspect="1"/>
+          </p:cNvSpPr>
+          <p:nvPr>
+            <p:ph type="sldImg" idx="2"/>
+          </p:nvPr>
+        </p:nvSpPr>
+        <p:spPr/>
+      </p:sp>
+      <p:sp>
+        <p:nvSpPr>
+          <p:cNvPr id="3" name="Slide Number Placeholder 2"/>
+          <p:cNvSpPr>
             <a:spLocks noGrp="1"/>
           </p:cNvSpPr>
           <p:nvPr>
-            <p:ph type="sldImg" idx="2"/>
+            <p:ph type="sldNum" sz="quarter" idx="5"/>
           </p:nvPr>
         </p:nvSpPr>
         <p:spPr/>
       </p:sp>
       <p:sp>
         <p:nvSpPr>
-          <p:cNvPr id="3" name="Slide Number Placeholder 2"/>
+          <p:cNvPr id="4" name="Notes Placeholder 3"/>
           <p:cNvSpPr>
             <a:spLocks noGrp="1"/>
           </p:cNvSpPr>
           <p:nvPr>
-            <p:ph type="sldNum" idx="5" sz="quarter"/>
-          </p:nvPr>
-        </p:nvSpPr>
-        <p:spPr/>
-      </p:sp>
-      <p:sp>
-        <p:nvSpPr>
-          <p:cNvPr id="4" name="Notes Placeholder 3"/>
-          <p:cNvSpPr>
-            <a:spLocks noGrp="1"/>
-          </p:cNvSpPr>
-          <p:nvPr>
-            <p:ph type="body" idx="3" sz="quarter"/>
+            <p:ph type="body" sz="quarter" idx="3"/>
           </p:nvPr>
         </p:nvSpPr>
         <p:spPr/>
@@ -1008,7 +1006,7 @@
 </file>
 
 <file path=ppt/notesSlides/notesSlide4.xml><?xml version="1.0" encoding="utf-8"?>
-<p:notes xmlns:a="http://schemas.openxmlformats.org/drawingml/2006/main" xmlns:p="http://schemas.openxmlformats.org/presentationml/2006/main" xmlns:r="http://schemas.openxmlformats.org/officeDocument/2006/relationships">
+<p:notes xmlns:a="http://schemas.openxmlformats.org/drawingml/2006/main" xmlns:r="http://schemas.openxmlformats.org/officeDocument/2006/relationships" xmlns:p="http://schemas.openxmlformats.org/presentationml/2006/main">
   <p:cSld>
     <p:spTree>
       <p:nvGrpSpPr>
@@ -1028,34 +1026,34 @@
         <p:nvSpPr>
           <p:cNvPr id="2" name="Slide Image Placeholder 1"/>
           <p:cNvSpPr>
+            <a:spLocks noGrp="1" noRot="1" noChangeAspect="1"/>
+          </p:cNvSpPr>
+          <p:nvPr>
+            <p:ph type="sldImg" idx="2"/>
+          </p:nvPr>
+        </p:nvSpPr>
+        <p:spPr/>
+      </p:sp>
+      <p:sp>
+        <p:nvSpPr>
+          <p:cNvPr id="3" name="Slide Number Placeholder 2"/>
+          <p:cNvSpPr>
             <a:spLocks noGrp="1"/>
           </p:cNvSpPr>
           <p:nvPr>
-            <p:ph type="sldImg" idx="2"/>
+            <p:ph type="sldNum" sz="quarter" idx="5"/>
           </p:nvPr>
         </p:nvSpPr>
         <p:spPr/>
       </p:sp>
       <p:sp>
         <p:nvSpPr>
-          <p:cNvPr id="3" name="Slide Number Placeholder 2"/>
+          <p:cNvPr id="4" name="Notes Placeholder 3"/>
           <p:cNvSpPr>
             <a:spLocks noGrp="1"/>
           </p:cNvSpPr>
           <p:nvPr>
-            <p:ph type="sldNum" idx="5" sz="quarter"/>
-          </p:nvPr>
-        </p:nvSpPr>
-        <p:spPr/>
-      </p:sp>
-      <p:sp>
-        <p:nvSpPr>
-          <p:cNvPr id="4" name="Notes Placeholder 3"/>
-          <p:cNvSpPr>
-            <a:spLocks noGrp="1"/>
-          </p:cNvSpPr>
-          <p:nvPr>
-            <p:ph type="body" idx="3" sz="quarter"/>
+            <p:ph type="body" sz="quarter" idx="3"/>
           </p:nvPr>
         </p:nvSpPr>
         <p:spPr/>
@@ -1085,7 +1083,7 @@
 </file>
 
 <file path=ppt/notesSlides/notesSlide5.xml><?xml version="1.0" encoding="utf-8"?>
-<p:notes xmlns:a="http://schemas.openxmlformats.org/drawingml/2006/main" xmlns:p="http://schemas.openxmlformats.org/presentationml/2006/main" xmlns:r="http://schemas.openxmlformats.org/officeDocument/2006/relationships">
+<p:notes xmlns:a="http://schemas.openxmlformats.org/drawingml/2006/main" xmlns:r="http://schemas.openxmlformats.org/officeDocument/2006/relationships" xmlns:p="http://schemas.openxmlformats.org/presentationml/2006/main">
   <p:cSld>
     <p:spTree>
       <p:nvGrpSpPr>
@@ -1105,34 +1103,34 @@
         <p:nvSpPr>
           <p:cNvPr id="2" name="Slide Image Placeholder 1"/>
           <p:cNvSpPr>
+            <a:spLocks noGrp="1" noRot="1" noChangeAspect="1"/>
+          </p:cNvSpPr>
+          <p:nvPr>
+            <p:ph type="sldImg" idx="2"/>
+          </p:nvPr>
+        </p:nvSpPr>
+        <p:spPr/>
+      </p:sp>
+      <p:sp>
+        <p:nvSpPr>
+          <p:cNvPr id="3" name="Slide Number Placeholder 2"/>
+          <p:cNvSpPr>
             <a:spLocks noGrp="1"/>
           </p:cNvSpPr>
           <p:nvPr>
-            <p:ph type="sldImg" idx="2"/>
+            <p:ph type="sldNum" sz="quarter" idx="5"/>
           </p:nvPr>
         </p:nvSpPr>
         <p:spPr/>
       </p:sp>
       <p:sp>
         <p:nvSpPr>
-          <p:cNvPr id="3" name="Slide Number Placeholder 2"/>
+          <p:cNvPr id="4" name="Notes Placeholder 3"/>
           <p:cNvSpPr>
             <a:spLocks noGrp="1"/>
           </p:cNvSpPr>
           <p:nvPr>
-            <p:ph type="sldNum" idx="5" sz="quarter"/>
-          </p:nvPr>
-        </p:nvSpPr>
-        <p:spPr/>
-      </p:sp>
-      <p:sp>
-        <p:nvSpPr>
-          <p:cNvPr id="4" name="Notes Placeholder 3"/>
-          <p:cNvSpPr>
-            <a:spLocks noGrp="1"/>
-          </p:cNvSpPr>
-          <p:nvPr>
-            <p:ph type="body" idx="3" sz="quarter"/>
+            <p:ph type="body" sz="quarter" idx="3"/>
           </p:nvPr>
         </p:nvSpPr>
         <p:spPr/>
@@ -1164,7 +1162,7 @@
 </file>
 
 <file path=ppt/notesSlides/notesSlide6.xml><?xml version="1.0" encoding="utf-8"?>
-<p:notes xmlns:a="http://schemas.openxmlformats.org/drawingml/2006/main" xmlns:p="http://schemas.openxmlformats.org/presentationml/2006/main" xmlns:r="http://schemas.openxmlformats.org/officeDocument/2006/relationships">
+<p:notes xmlns:a="http://schemas.openxmlformats.org/drawingml/2006/main" xmlns:r="http://schemas.openxmlformats.org/officeDocument/2006/relationships" xmlns:p="http://schemas.openxmlformats.org/presentationml/2006/main">
   <p:cSld>
     <p:spTree>
       <p:nvGrpSpPr>
@@ -1184,34 +1182,34 @@
         <p:nvSpPr>
           <p:cNvPr id="2" name="Slide Image Placeholder 1"/>
           <p:cNvSpPr>
+            <a:spLocks noGrp="1" noRot="1" noChangeAspect="1"/>
+          </p:cNvSpPr>
+          <p:nvPr>
+            <p:ph type="sldImg" idx="2"/>
+          </p:nvPr>
+        </p:nvSpPr>
+        <p:spPr/>
+      </p:sp>
+      <p:sp>
+        <p:nvSpPr>
+          <p:cNvPr id="3" name="Slide Number Placeholder 2"/>
+          <p:cNvSpPr>
             <a:spLocks noGrp="1"/>
           </p:cNvSpPr>
           <p:nvPr>
-            <p:ph type="sldImg" idx="2"/>
+            <p:ph type="sldNum" sz="quarter" idx="5"/>
           </p:nvPr>
         </p:nvSpPr>
         <p:spPr/>
       </p:sp>
       <p:sp>
         <p:nvSpPr>
-          <p:cNvPr id="3" name="Slide Number Placeholder 2"/>
+          <p:cNvPr id="4" name="Notes Placeholder 3"/>
           <p:cNvSpPr>
             <a:spLocks noGrp="1"/>
           </p:cNvSpPr>
           <p:nvPr>
-            <p:ph type="sldNum" idx="5" sz="quarter"/>
-          </p:nvPr>
-        </p:nvSpPr>
-        <p:spPr/>
-      </p:sp>
-      <p:sp>
-        <p:nvSpPr>
-          <p:cNvPr id="4" name="Notes Placeholder 3"/>
-          <p:cNvSpPr>
-            <a:spLocks noGrp="1"/>
-          </p:cNvSpPr>
-          <p:nvPr>
-            <p:ph type="body" idx="3" sz="quarter"/>
+            <p:ph type="body" sz="quarter" idx="3"/>
           </p:nvPr>
         </p:nvSpPr>
         <p:spPr/>
@@ -1259,7 +1257,7 @@
 </file>
 
 <file path=ppt/notesSlides/notesSlide7.xml><?xml version="1.0" encoding="utf-8"?>
-<p:notes xmlns:a="http://schemas.openxmlformats.org/drawingml/2006/main" xmlns:p="http://schemas.openxmlformats.org/presentationml/2006/main" xmlns:r="http://schemas.openxmlformats.org/officeDocument/2006/relationships">
+<p:notes xmlns:a="http://schemas.openxmlformats.org/drawingml/2006/main" xmlns:r="http://schemas.openxmlformats.org/officeDocument/2006/relationships" xmlns:p="http://schemas.openxmlformats.org/presentationml/2006/main">
   <p:cSld>
     <p:spTree>
       <p:nvGrpSpPr>
@@ -1279,34 +1277,34 @@
         <p:nvSpPr>
           <p:cNvPr id="2" name="Slide Image Placeholder 1"/>
           <p:cNvSpPr>
+            <a:spLocks noGrp="1" noRot="1" noChangeAspect="1"/>
+          </p:cNvSpPr>
+          <p:nvPr>
+            <p:ph type="sldImg" idx="2"/>
+          </p:nvPr>
+        </p:nvSpPr>
+        <p:spPr/>
+      </p:sp>
+      <p:sp>
+        <p:nvSpPr>
+          <p:cNvPr id="3" name="Slide Number Placeholder 2"/>
+          <p:cNvSpPr>
             <a:spLocks noGrp="1"/>
           </p:cNvSpPr>
           <p:nvPr>
-            <p:ph type="sldImg" idx="2"/>
+            <p:ph type="sldNum" sz="quarter" idx="5"/>
           </p:nvPr>
         </p:nvSpPr>
         <p:spPr/>
       </p:sp>
       <p:sp>
         <p:nvSpPr>
-          <p:cNvPr id="3" name="Slide Number Placeholder 2"/>
+          <p:cNvPr id="4" name="Notes Placeholder 3"/>
           <p:cNvSpPr>
             <a:spLocks noGrp="1"/>
           </p:cNvSpPr>
           <p:nvPr>
-            <p:ph type="sldNum" idx="5" sz="quarter"/>
-          </p:nvPr>
-        </p:nvSpPr>
-        <p:spPr/>
-      </p:sp>
-      <p:sp>
-        <p:nvSpPr>
-          <p:cNvPr id="4" name="Notes Placeholder 3"/>
-          <p:cNvSpPr>
-            <a:spLocks noGrp="1"/>
-          </p:cNvSpPr>
-          <p:nvPr>
-            <p:ph type="body" idx="3" sz="quarter"/>
+            <p:ph type="body" sz="quarter" idx="3"/>
           </p:nvPr>
         </p:nvSpPr>
         <p:spPr/>
@@ -1329,7 +1327,7 @@
 </file>
 
 <file path=ppt/notesSlides/notesSlide8.xml><?xml version="1.0" encoding="utf-8"?>
-<p:notes xmlns:a="http://schemas.openxmlformats.org/drawingml/2006/main" xmlns:p="http://schemas.openxmlformats.org/presentationml/2006/main" xmlns:r="http://schemas.openxmlformats.org/officeDocument/2006/relationships">
+<p:notes xmlns:a="http://schemas.openxmlformats.org/drawingml/2006/main" xmlns:r="http://schemas.openxmlformats.org/officeDocument/2006/relationships" xmlns:p="http://schemas.openxmlformats.org/presentationml/2006/main">
   <p:cSld>
     <p:spTree>
       <p:nvGrpSpPr>
@@ -1349,34 +1347,34 @@
         <p:nvSpPr>
           <p:cNvPr id="2" name="Slide Image Placeholder 1"/>
           <p:cNvSpPr>
+            <a:spLocks noGrp="1" noRot="1" noChangeAspect="1"/>
+          </p:cNvSpPr>
+          <p:nvPr>
+            <p:ph type="sldImg" idx="2"/>
+          </p:nvPr>
+        </p:nvSpPr>
+        <p:spPr/>
+      </p:sp>
+      <p:sp>
+        <p:nvSpPr>
+          <p:cNvPr id="3" name="Slide Number Placeholder 2"/>
+          <p:cNvSpPr>
             <a:spLocks noGrp="1"/>
           </p:cNvSpPr>
           <p:nvPr>
-            <p:ph type="sldImg" idx="2"/>
+            <p:ph type="sldNum" sz="quarter" idx="5"/>
           </p:nvPr>
         </p:nvSpPr>
         <p:spPr/>
       </p:sp>
       <p:sp>
         <p:nvSpPr>
-          <p:cNvPr id="3" name="Slide Number Placeholder 2"/>
+          <p:cNvPr id="4" name="Notes Placeholder 3"/>
           <p:cNvSpPr>
             <a:spLocks noGrp="1"/>
           </p:cNvSpPr>
           <p:nvPr>
-            <p:ph type="sldNum" idx="5" sz="quarter"/>
-          </p:nvPr>
-        </p:nvSpPr>
-        <p:spPr/>
-      </p:sp>
-      <p:sp>
-        <p:nvSpPr>
-          <p:cNvPr id="4" name="Notes Placeholder 3"/>
-          <p:cNvSpPr>
-            <a:spLocks noGrp="1"/>
-          </p:cNvSpPr>
-          <p:nvPr>
-            <p:ph type="body" idx="3" sz="quarter"/>
+            <p:ph type="body" sz="quarter" idx="3"/>
           </p:nvPr>
         </p:nvSpPr>
         <p:spPr/>
@@ -2966,7 +2964,7 @@
 </file>
 
 <file path=ppt/slides/slide1.xml><?xml version="1.0" encoding="utf-8"?>
-<p:sld xmlns:a="http://schemas.openxmlformats.org/drawingml/2006/main" xmlns:p="http://schemas.openxmlformats.org/presentationml/2006/main" xmlns:r="http://schemas.openxmlformats.org/officeDocument/2006/relationships">
+<p:sld xmlns:a="http://schemas.openxmlformats.org/drawingml/2006/main" xmlns:r="http://schemas.openxmlformats.org/officeDocument/2006/relationships" xmlns:p="http://schemas.openxmlformats.org/presentationml/2006/main">
   <p:cSld>
     <p:spTree>
       <p:nvGrpSpPr>
@@ -2974,7 +2972,14 @@
         <p:cNvGrpSpPr/>
         <p:nvPr/>
       </p:nvGrpSpPr>
-      <p:grpSpPr/>
+      <p:grpSpPr>
+        <a:xfrm>
+          <a:off x="0" y="0"/>
+          <a:ext cx="0" cy="0"/>
+          <a:chOff x="0" y="0"/>
+          <a:chExt cx="0" cy="0"/>
+        </a:xfrm>
+      </p:grpSpPr>
       <p:sp>
         <p:nvSpPr>
           <p:cNvPr id="2" name="Subtitle 1"/>
@@ -2982,14 +2987,16 @@
             <a:spLocks noGrp="1"/>
           </p:cNvSpPr>
           <p:nvPr>
-            <p:ph type="subTitle" idx="1" sz="quarter"/>
+            <p:ph type="subTitle" sz="quarter" idx="1"/>
           </p:nvPr>
         </p:nvSpPr>
         <p:spPr/>
         <p:txBody>
           <a:bodyPr/>
           <a:lstStyle/>
-          <a:p/>
+          <a:p>
+            <a:endParaRPr/>
+          </a:p>
         </p:txBody>
       </p:sp>
       <p:sp>
@@ -3015,9 +3022,6 @@
               </a:rPr>
               <a:t>Intermediate 1 — Producer Internals</a:t>
             </a:r>
-            <a:endParaRPr sz="4200" b="1" i="0">
-              <a:latin typeface="Times New Roman"/>
-            </a:endParaRPr>
           </a:p>
         </p:txBody>
       </p:sp>
@@ -3063,7 +3067,7 @@
 </file>
 
 <file path=ppt/slides/slide10.xml><?xml version="1.0" encoding="utf-8"?>
-<p:sld xmlns:a="http://schemas.openxmlformats.org/drawingml/2006/main" xmlns:p="http://schemas.openxmlformats.org/presentationml/2006/main" xmlns:r="http://schemas.openxmlformats.org/officeDocument/2006/relationships">
+<p:sld xmlns:a="http://schemas.openxmlformats.org/drawingml/2006/main" xmlns:r="http://schemas.openxmlformats.org/officeDocument/2006/relationships" xmlns:p="http://schemas.openxmlformats.org/presentationml/2006/main">
   <p:cSld>
     <p:spTree>
       <p:nvGrpSpPr>
@@ -3071,7 +3075,14 @@
         <p:cNvGrpSpPr/>
         <p:nvPr/>
       </p:nvGrpSpPr>
-      <p:grpSpPr/>
+      <p:grpSpPr>
+        <a:xfrm>
+          <a:off x="0" y="0"/>
+          <a:ext cx="0" cy="0"/>
+          <a:chOff x="0" y="0"/>
+          <a:chExt cx="0" cy="0"/>
+        </a:xfrm>
+      </p:grpSpPr>
       <p:sp>
         <p:nvSpPr>
           <p:cNvPr id="2" name="Title 1"/>
@@ -3122,15 +3133,12 @@
               <a:t> in-sync</a:t>
             </a:r>
             <a:r>
-              <a:t> replicas" — but if the ISR has shrunk to just the</a:t>
-            </a:r>
-            <a:r>
-              <a:t> leader, "all" is one. The topic/broker setting</a:t>
-            </a:r>
-          </a:p>
-          <a:p>
-            <a:r>
-              <a:rPr i="1" b="1"/>
+              <a:t> replicas" — but if the ISR has shrunk to just the leader, "all" is one. The topic/broker setting</a:t>
+            </a:r>
+          </a:p>
+          <a:p>
+            <a:r>
+              <a:rPr b="1" i="1"/>
               <a:t> min.insync.replicas</a:t>
             </a:r>
             <a:r>
@@ -3227,7 +3235,7 @@
 </file>
 
 <file path=ppt/slides/slide11.xml><?xml version="1.0" encoding="utf-8"?>
-<p:sld xmlns:a="http://schemas.openxmlformats.org/drawingml/2006/main" xmlns:p="http://schemas.openxmlformats.org/presentationml/2006/main" xmlns:r="http://schemas.openxmlformats.org/officeDocument/2006/relationships">
+<p:sld xmlns:a="http://schemas.openxmlformats.org/drawingml/2006/main" xmlns:r="http://schemas.openxmlformats.org/officeDocument/2006/relationships" xmlns:p="http://schemas.openxmlformats.org/presentationml/2006/main">
   <p:cSld>
     <p:spTree>
       <p:nvGrpSpPr>
@@ -3235,7 +3243,14 @@
         <p:cNvGrpSpPr/>
         <p:nvPr/>
       </p:nvGrpSpPr>
-      <p:grpSpPr/>
+      <p:grpSpPr>
+        <a:xfrm>
+          <a:off x="0" y="0"/>
+          <a:ext cx="0" cy="0"/>
+          <a:chOff x="0" y="0"/>
+          <a:chExt cx="0" cy="0"/>
+        </a:xfrm>
+      </p:grpSpPr>
       <p:sp>
         <p:nvSpPr>
           <p:cNvPr id="2" name="Title 1"/>
@@ -3280,10 +3295,7 @@
               <a:t> retries</a:t>
             </a:r>
             <a:r>
-              <a:t> — which is</a:t>
-            </a:r>
-            <a:r>
-              <a:t> usually what you want, but it interacts with ordering.</a:t>
+              <a:t> — which is usually what you want, but it interacts with ordering.</a:t>
             </a:r>
           </a:p>
           <a:p>
@@ -3300,7 +3312,7 @@
           </a:p>
           <a:p>
             <a:r>
-              <a:rPr i="1" b="1"/>
+              <a:rPr b="1" i="1"/>
               <a:t> max.in.flight.requests.per.connection</a:t>
             </a:r>
           </a:p>
@@ -3318,10 +3330,7 @@
               <a:t> idempotence</a:t>
             </a:r>
             <a:r>
-              <a:t> (next slides) solves it</a:t>
-            </a:r>
-            <a:r>
-              <a:t> cleanly</a:t>
+              <a:t> (next slides) solves it cleanly</a:t>
             </a:r>
           </a:p>
           <a:p>
@@ -3377,7 +3386,7 @@
 </file>
 
 <file path=ppt/slides/slide12.xml><?xml version="1.0" encoding="utf-8"?>
-<p:sld xmlns:a="http://schemas.openxmlformats.org/drawingml/2006/main" xmlns:p="http://schemas.openxmlformats.org/presentationml/2006/main" xmlns:r="http://schemas.openxmlformats.org/officeDocument/2006/relationships">
+<p:sld xmlns:a="http://schemas.openxmlformats.org/drawingml/2006/main" xmlns:r="http://schemas.openxmlformats.org/officeDocument/2006/relationships" xmlns:p="http://schemas.openxmlformats.org/presentationml/2006/main">
   <p:cSld>
     <p:spTree>
       <p:nvGrpSpPr>
@@ -3385,7 +3394,14 @@
         <p:cNvGrpSpPr/>
         <p:nvPr/>
       </p:nvGrpSpPr>
-      <p:grpSpPr/>
+      <p:grpSpPr>
+        <a:xfrm>
+          <a:off x="0" y="0"/>
+          <a:ext cx="0" cy="0"/>
+          <a:chOff x="0" y="0"/>
+          <a:chExt cx="0" cy="0"/>
+        </a:xfrm>
+      </p:grpSpPr>
       <p:sp>
         <p:nvSpPr>
           <p:cNvPr id="2" name="Title 1"/>
@@ -3423,77 +3439,95 @@
           <a:lstStyle/>
           <a:p>
             <a:r>
+              <a:rPr dirty="0"/>
               <a:t> A subtle failure: the broker</a:t>
             </a:r>
             <a:r>
-              <a:rPr b="1"/>
+              <a:rPr b="1" dirty="0"/>
               <a:t> writes</a:t>
             </a:r>
             <a:r>
+              <a:rPr dirty="0"/>
               <a:t> the record, then the</a:t>
             </a:r>
             <a:r>
-              <a:rPr b="1"/>
+              <a:rPr b="1" dirty="0"/>
               <a:t> ack is lost</a:t>
             </a:r>
             <a:r>
-              <a:t> on the way</a:t>
-            </a:r>
-            <a:r>
-              <a:t> back. The producer thinks it failed and</a:t>
-            </a:r>
-            <a:r>
-              <a:rPr b="1"/>
+              <a:rPr dirty="0"/>
+              <a:t> on the way back. The producer thinks it failed and</a:t>
+            </a:r>
+            <a:r>
+              <a:rPr b="1" dirty="0"/>
               <a:t> retries</a:t>
             </a:r>
             <a:r>
+              <a:rPr dirty="0"/>
               <a:t> → the record is written</a:t>
             </a:r>
             <a:r>
-              <a:rPr b="1"/>
+              <a:rPr b="1" dirty="0"/>
               <a:t> twice</a:t>
             </a:r>
             <a:r>
+              <a:rPr dirty="0"/>
               <a:t> .</a:t>
             </a:r>
           </a:p>
-          <a:p/>
-          <a:p/>
-          <a:p>
-            <a:r>
+          <a:p>
+            <a:endParaRPr dirty="0"/>
+          </a:p>
+          <a:p>
+            <a:endParaRPr lang="en-US" dirty="0"/>
+          </a:p>
+          <a:p>
+            <a:endParaRPr lang="en-US" dirty="0"/>
+          </a:p>
+          <a:p>
+            <a:endParaRPr dirty="0"/>
+          </a:p>
+          <a:p>
+            <a:r>
+              <a:rPr dirty="0"/>
               <a:t> With plain</a:t>
             </a:r>
             <a:r>
-              <a:rPr>
+              <a:rPr dirty="0">
                 <a:latin typeface="Courier New"/>
               </a:rPr>
               <a:t> acks=all</a:t>
             </a:r>
             <a:r>
+              <a:rPr dirty="0"/>
               <a:t> + retries, you get</a:t>
             </a:r>
             <a:r>
-              <a:rPr b="1"/>
+              <a:rPr b="1" dirty="0"/>
               <a:t> at-least-once</a:t>
             </a:r>
             <a:r>
+              <a:rPr dirty="0"/>
               <a:t> : no loss, but possible duplicates</a:t>
             </a:r>
           </a:p>
           <a:p>
             <a:r>
+              <a:rPr dirty="0"/>
               <a:t> For many pipelines duplicates are unacceptable (double charges, double counts)</a:t>
             </a:r>
           </a:p>
           <a:p>
             <a:r>
+              <a:rPr dirty="0"/>
               <a:t> This is exactly what the</a:t>
             </a:r>
             <a:r>
-              <a:rPr b="1"/>
+              <a:rPr b="1" dirty="0"/>
               <a:t> idempotent producer</a:t>
             </a:r>
             <a:r>
+              <a:rPr dirty="0"/>
               <a:t> fixes.</a:t>
             </a:r>
           </a:p>
@@ -3548,8 +3582,8 @@
         </p:blipFill>
         <p:spPr>
           <a:xfrm>
-            <a:off x="0" y="1353312"/>
-            <a:ext cx="10312400" cy="1054100"/>
+            <a:off x="0" y="2427877"/>
+            <a:ext cx="9258300" cy="946353"/>
           </a:xfrm>
           <a:prstGeom prst="rect">
             <a:avLst/>
@@ -3565,7 +3599,7 @@
 </file>
 
 <file path=ppt/slides/slide13.xml><?xml version="1.0" encoding="utf-8"?>
-<p:sld xmlns:a="http://schemas.openxmlformats.org/drawingml/2006/main" xmlns:p="http://schemas.openxmlformats.org/presentationml/2006/main" xmlns:r="http://schemas.openxmlformats.org/officeDocument/2006/relationships">
+<p:sld xmlns:a="http://schemas.openxmlformats.org/drawingml/2006/main" xmlns:r="http://schemas.openxmlformats.org/officeDocument/2006/relationships" xmlns:p="http://schemas.openxmlformats.org/presentationml/2006/main">
   <p:cSld>
     <p:spTree>
       <p:nvGrpSpPr>
@@ -3573,7 +3607,14 @@
         <p:cNvGrpSpPr/>
         <p:nvPr/>
       </p:nvGrpSpPr>
-      <p:grpSpPr/>
+      <p:grpSpPr>
+        <a:xfrm>
+          <a:off x="0" y="0"/>
+          <a:ext cx="0" cy="0"/>
+          <a:chOff x="0" y="0"/>
+          <a:chExt cx="0" cy="0"/>
+        </a:xfrm>
+      </p:grpSpPr>
       <p:sp>
         <p:nvSpPr>
           <p:cNvPr id="2" name="Title 1"/>
@@ -3611,97 +3652,1380 @@
           <a:lstStyle/>
           <a:p>
             <a:r>
+              <a:rPr dirty="0"/>
               <a:t> Turn on idempotence and the broker will</a:t>
             </a:r>
             <a:r>
+              <a:rPr b="1" dirty="0"/>
+              <a:t> de-duplicate</a:t>
+            </a:r>
+            <a:r>
+              <a:rPr dirty="0"/>
+              <a:t> the producer's retries automatically.</a:t>
+            </a:r>
+          </a:p>
+          <a:p>
+            <a:endParaRPr dirty="0"/>
+          </a:p>
+          <a:p>
+            <a:endParaRPr lang="en-US" dirty="0"/>
+          </a:p>
+          <a:p>
+            <a:r>
+              <a:rPr dirty="0"/>
+              <a:t> How it works, briefly:</a:t>
+            </a:r>
+          </a:p>
+          <a:p>
+            <a:r>
+              <a:rPr dirty="0"/>
+              <a:t> The producer gets a</a:t>
+            </a:r>
+            <a:r>
+              <a:rPr b="1" dirty="0"/>
+              <a:t> Producer ID (PID)</a:t>
+            </a:r>
+            <a:r>
+              <a:rPr dirty="0"/>
+              <a:t> and attaches a</a:t>
+            </a:r>
+            <a:r>
+              <a:rPr b="1" dirty="0"/>
+              <a:t> sequence number</a:t>
+            </a:r>
+            <a:r>
+              <a:rPr dirty="0"/>
+              <a:t> per partition</a:t>
+            </a:r>
+          </a:p>
+          <a:p>
+            <a:r>
+              <a:rPr dirty="0"/>
+              <a:t> The broker tracks the last sequence it accepted per (PID, partition)</a:t>
+            </a:r>
+          </a:p>
+          <a:p>
+            <a:r>
+              <a:rPr dirty="0"/>
+              <a:t> A</a:t>
+            </a:r>
+            <a:r>
+              <a:rPr b="1" dirty="0"/>
+              <a:t> retried</a:t>
+            </a:r>
+            <a:r>
+              <a:rPr dirty="0"/>
+              <a:t> record has the same sequence → the broker</a:t>
+            </a:r>
+            <a:r>
+              <a:rPr b="1" dirty="0"/>
+              <a:t> discards the duplicate</a:t>
+            </a:r>
+          </a:p>
+          <a:p>
+            <a:r>
+              <a:rPr dirty="0"/>
+              <a:t> Result:</a:t>
+            </a:r>
+            <a:r>
+              <a:rPr b="1" dirty="0"/>
+              <a:t> exactly-once delivery from producer to broker</a:t>
+            </a:r>
+            <a:r>
+              <a:rPr dirty="0"/>
+              <a:t> , even across retries. Cheap enough to be a default — and since Kafka 3.0 it</a:t>
+            </a:r>
+            <a:r>
+              <a:rPr b="1" dirty="0"/>
+              <a:t> is</a:t>
+            </a:r>
+            <a:r>
+              <a:rPr dirty="0"/>
+              <a:t> the default (</a:t>
+            </a:r>
+            <a:r>
+              <a:rPr dirty="0">
+                <a:latin typeface="Courier New"/>
+              </a:rPr>
+              <a:t> </a:t>
+            </a:r>
+            <a:r>
+              <a:rPr dirty="0" err="1">
+                <a:latin typeface="Courier New"/>
+              </a:rPr>
+              <a:t>enable.idempotence</a:t>
+            </a:r>
+            <a:r>
+              <a:rPr dirty="0">
+                <a:latin typeface="Courier New"/>
+              </a:rPr>
+              <a:t>=true</a:t>
+            </a:r>
+            <a:r>
+              <a:rPr dirty="0"/>
+              <a:t> ), so on Kafka 4 you get it unless you turn it off.</a:t>
+            </a:r>
+          </a:p>
+        </p:txBody>
+      </p:sp>
+      <p:sp>
+        <p:nvSpPr>
+          <p:cNvPr id="4" name="TextBox 3"/>
+          <p:cNvSpPr txBox="1"/>
+          <p:nvPr/>
+        </p:nvSpPr>
+        <p:spPr>
+          <a:xfrm>
+            <a:off x="704088" y="8065008"/>
+            <a:ext cx="8915400" cy="228600"/>
+          </a:xfrm>
+          <a:prstGeom prst="rect">
+            <a:avLst/>
+          </a:prstGeom>
+          <a:noFill/>
+        </p:spPr>
+        <p:txBody>
+          <a:bodyPr wrap="none">
+            <a:spAutoFit/>
+          </a:bodyPr>
+          <a:lstStyle/>
+          <a:p>
+            <a:r>
+              <a:rPr sz="800">
+                <a:solidFill>
+                  <a:srgbClr val="000000"/>
+                </a:solidFill>
+              </a:rPr>
+              <a:t>Copyright © 2026 by Elephant Scale, All Rights Reserved</a:t>
+            </a:r>
+          </a:p>
+        </p:txBody>
+      </p:sp>
+      <p:pic>
+        <p:nvPicPr>
+          <p:cNvPr id="5" name="Picture 4" descr="1.png"/>
+          <p:cNvPicPr>
+            <a:picLocks noChangeAspect="1"/>
+          </p:cNvPicPr>
+          <p:nvPr/>
+        </p:nvPicPr>
+        <p:blipFill>
+          <a:blip r:embed="rId3"/>
+          <a:stretch>
+            <a:fillRect/>
+          </a:stretch>
+        </p:blipFill>
+        <p:spPr>
+          <a:xfrm>
+            <a:off x="0" y="2015331"/>
+            <a:ext cx="8915400" cy="476513"/>
+          </a:xfrm>
+          <a:prstGeom prst="rect">
+            <a:avLst/>
+          </a:prstGeom>
+        </p:spPr>
+      </p:pic>
+    </p:spTree>
+  </p:cSld>
+  <p:clrMapOvr>
+    <a:masterClrMapping/>
+  </p:clrMapOvr>
+</p:sld>
+</file>
+
+<file path=ppt/slides/slide14.xml><?xml version="1.0" encoding="utf-8"?>
+<p:sld xmlns:a="http://schemas.openxmlformats.org/drawingml/2006/main" xmlns:r="http://schemas.openxmlformats.org/officeDocument/2006/relationships" xmlns:p="http://schemas.openxmlformats.org/presentationml/2006/main">
+  <p:cSld>
+    <p:spTree>
+      <p:nvGrpSpPr>
+        <p:cNvPr id="1" name=""/>
+        <p:cNvGrpSpPr/>
+        <p:nvPr/>
+      </p:nvGrpSpPr>
+      <p:grpSpPr>
+        <a:xfrm>
+          <a:off x="0" y="0"/>
+          <a:ext cx="0" cy="0"/>
+          <a:chOff x="0" y="0"/>
+          <a:chExt cx="0" cy="0"/>
+        </a:xfrm>
+      </p:grpSpPr>
+      <p:sp>
+        <p:nvSpPr>
+          <p:cNvPr id="2" name="Title 1"/>
+          <p:cNvSpPr>
+            <a:spLocks noGrp="1"/>
+          </p:cNvSpPr>
+          <p:nvPr>
+            <p:ph type="title"/>
+          </p:nvPr>
+        </p:nvSpPr>
+        <p:spPr/>
+        <p:txBody>
+          <a:bodyPr/>
+          <a:lstStyle/>
+          <a:p>
+            <a:r>
+              <a:t>What Idempotence Does and Doesn't Cover</a:t>
+            </a:r>
+          </a:p>
+        </p:txBody>
+      </p:sp>
+      <p:sp>
+        <p:nvSpPr>
+          <p:cNvPr id="3" name="Content Placeholder 2"/>
+          <p:cNvSpPr>
+            <a:spLocks noGrp="1"/>
+          </p:cNvSpPr>
+          <p:nvPr>
+            <p:ph idx="1"/>
+          </p:nvPr>
+        </p:nvSpPr>
+        <p:spPr/>
+        <p:txBody>
+          <a:bodyPr/>
+          <a:lstStyle/>
+          <a:p>
+            <a:r>
+              <a:t> Be precise about the guarantee — it's a common interview and production trap.</a:t>
+            </a:r>
+          </a:p>
+          <a:p>
+            <a:r>
+              <a:t> ✅ De-dupes</a:t>
+            </a:r>
+            <a:r>
               <a:rPr b="1"/>
-              <a:t> de-duplicate</a:t>
-            </a:r>
-            <a:r>
-              <a:t> the producer's retries</a:t>
-            </a:r>
-            <a:r>
-              <a:t> automatically.</a:t>
-            </a:r>
-          </a:p>
-          <a:p/>
-          <a:p>
-            <a:r>
-              <a:t> How it works, briefly:</a:t>
-            </a:r>
-          </a:p>
-          <a:p>
-            <a:r>
-              <a:t> The producer gets a</a:t>
+              <a:t> this producer's retries</a:t>
+            </a:r>
+            <a:r>
+              <a:t> to a partition → no duplicates from resend</a:t>
+            </a:r>
+          </a:p>
+          <a:p>
+            <a:r>
+              <a:t> ✅ Preserves</a:t>
             </a:r>
             <a:r>
               <a:rPr b="1"/>
-              <a:t> Producer ID (PID)</a:t>
-            </a:r>
-            <a:r>
-              <a:t> and attaches a</a:t>
+              <a:t> ordering</a:t>
+            </a:r>
+            <a:r>
+              <a:t> even with retries and multiple in-flight batches</a:t>
+            </a:r>
+          </a:p>
+          <a:p>
+            <a:r>
+              <a:t> ❌ Does</a:t>
             </a:r>
             <a:r>
               <a:rPr b="1"/>
-              <a:t> sequence number</a:t>
-            </a:r>
-            <a:r>
-              <a:t> per partition</a:t>
-            </a:r>
-          </a:p>
-          <a:p>
-            <a:r>
-              <a:t> The broker tracks the last sequence it accepted per (PID, partition)</a:t>
-            </a:r>
-          </a:p>
-          <a:p>
-            <a:r>
-              <a:t> A</a:t>
-            </a:r>
-            <a:r>
-              <a:rPr b="1"/>
-              <a:t> retried</a:t>
-            </a:r>
-            <a:r>
-              <a:t> record has the same sequence → the broker</a:t>
-            </a:r>
-            <a:r>
-              <a:rPr b="1"/>
-              <a:t> discards the duplicate</a:t>
-            </a:r>
-          </a:p>
-          <a:p>
-            <a:r>
-              <a:t> Result:</a:t>
-            </a:r>
-            <a:r>
-              <a:rPr b="1"/>
-              <a:t> exactly-once delivery from producer to broker</a:t>
-            </a:r>
-            <a:r>
-              <a:t> , even across retries. Cheap</a:t>
-            </a:r>
-            <a:r>
-              <a:t> enough to be a default — and since Kafka 3.0 it</a:t>
-            </a:r>
-            <a:r>
-              <a:rPr b="1"/>
-              <a:t> is</a:t>
-            </a:r>
-            <a:r>
-              <a:t> the default (</a:t>
+              <a:t> not</a:t>
+            </a:r>
+            <a:r>
+              <a:t> de-dupe if</a:t>
+            </a:r>
+            <a:r>
+              <a:rPr i="1"/>
+              <a:t> your application</a:t>
+            </a:r>
+            <a:r>
+              <a:t> calls</a:t>
             </a:r>
             <a:r>
               <a:rPr>
                 <a:latin typeface="Courier New"/>
               </a:rPr>
-              <a:t> enable.idempotence=true</a:t>
-            </a:r>
-            <a:r>
-              <a:t> ),</a:t>
-            </a:r>
-            <a:r>
-              <a:t> so on Kafka 4 you get it unless you turn it off.</a:t>
+              <a:t> send()</a:t>
+            </a:r>
+            <a:r>
+              <a:t> twice for the same event</a:t>
+            </a:r>
+          </a:p>
+          <a:p>
+            <a:r>
+              <a:t> ❌ Does</a:t>
+            </a:r>
+            <a:r>
+              <a:rPr b="1"/>
+              <a:t> not</a:t>
+            </a:r>
+            <a:r>
+              <a:t> span</a:t>
+            </a:r>
+            <a:r>
+              <a:rPr b="1"/>
+              <a:t> multiple partitions or a consume-process-produce loop</a:t>
+            </a:r>
+            <a:r>
+              <a:t> — that needs</a:t>
+            </a:r>
+            <a:r>
+              <a:rPr b="1"/>
+              <a:t> transactions</a:t>
+            </a:r>
+            <a:r>
+              <a:t> (Module 7 / Delivery Semantics)</a:t>
+            </a:r>
+          </a:p>
+          <a:p>
+            <a:r>
+              <a:rPr b="1"/>
+              <a:t> Idempotence = exactly-once</a:t>
+            </a:r>
+          </a:p>
+        </p:txBody>
+      </p:sp>
+      <p:sp>
+        <p:nvSpPr>
+          <p:cNvPr id="4" name="TextBox 3"/>
+          <p:cNvSpPr txBox="1"/>
+          <p:nvPr/>
+        </p:nvSpPr>
+        <p:spPr>
+          <a:xfrm>
+            <a:off x="704088" y="8065008"/>
+            <a:ext cx="8915400" cy="228600"/>
+          </a:xfrm>
+          <a:prstGeom prst="rect">
+            <a:avLst/>
+          </a:prstGeom>
+          <a:noFill/>
+        </p:spPr>
+        <p:txBody>
+          <a:bodyPr wrap="none">
+            <a:spAutoFit/>
+          </a:bodyPr>
+          <a:lstStyle/>
+          <a:p>
+            <a:r>
+              <a:rPr sz="800">
+                <a:solidFill>
+                  <a:srgbClr val="000000"/>
+                </a:solidFill>
+              </a:rPr>
+              <a:t>Copyright © 2026 by Elephant Scale, All Rights Reserved</a:t>
+            </a:r>
+          </a:p>
+        </p:txBody>
+      </p:sp>
+    </p:spTree>
+  </p:cSld>
+  <p:clrMapOvr>
+    <a:masterClrMapping/>
+  </p:clrMapOvr>
+</p:sld>
+</file>
+
+<file path=ppt/slides/slide15.xml><?xml version="1.0" encoding="utf-8"?>
+<p:sld xmlns:a="http://schemas.openxmlformats.org/drawingml/2006/main" xmlns:r="http://schemas.openxmlformats.org/officeDocument/2006/relationships" xmlns:p="http://schemas.openxmlformats.org/presentationml/2006/main">
+  <p:cSld>
+    <p:spTree>
+      <p:nvGrpSpPr>
+        <p:cNvPr id="1" name=""/>
+        <p:cNvGrpSpPr/>
+        <p:nvPr/>
+      </p:nvGrpSpPr>
+      <p:grpSpPr>
+        <a:xfrm>
+          <a:off x="0" y="0"/>
+          <a:ext cx="0" cy="0"/>
+          <a:chOff x="0" y="0"/>
+          <a:chExt cx="0" cy="0"/>
+        </a:xfrm>
+      </p:grpSpPr>
+      <p:sp>
+        <p:nvSpPr>
+          <p:cNvPr id="2" name="Title 1"/>
+          <p:cNvSpPr>
+            <a:spLocks noGrp="1"/>
+          </p:cNvSpPr>
+          <p:nvPr>
+            <p:ph type="title"/>
+          </p:nvPr>
+        </p:nvSpPr>
+        <p:spPr/>
+        <p:txBody>
+          <a:bodyPr/>
+          <a:lstStyle/>
+          <a:p>
+            <a:r>
+              <a:t>A Tuned Producer, End to End</a:t>
+            </a:r>
+          </a:p>
+        </p:txBody>
+      </p:sp>
+      <p:sp>
+        <p:nvSpPr>
+          <p:cNvPr id="3" name="Content Placeholder 2"/>
+          <p:cNvSpPr>
+            <a:spLocks noGrp="1"/>
+          </p:cNvSpPr>
+          <p:nvPr>
+            <p:ph idx="1"/>
+          </p:nvPr>
+        </p:nvSpPr>
+        <p:spPr/>
+        <p:txBody>
+          <a:bodyPr/>
+          <a:lstStyle/>
+          <a:p>
+            <a:r>
+              <a:t> Putting the pipeline together — a sensible production baseline:</a:t>
+            </a:r>
+          </a:p>
+          <a:p>
+            <a:endParaRPr/>
+          </a:p>
+          <a:p>
+            <a:endParaRPr/>
+          </a:p>
+          <a:p>
+            <a:endParaRPr/>
+          </a:p>
+          <a:p>
+            <a:endParaRPr/>
+          </a:p>
+          <a:p>
+            <a:endParaRPr/>
+          </a:p>
+          <a:p>
+            <a:endParaRPr/>
+          </a:p>
+        </p:txBody>
+      </p:sp>
+      <p:sp>
+        <p:nvSpPr>
+          <p:cNvPr id="4" name="TextBox 3"/>
+          <p:cNvSpPr txBox="1"/>
+          <p:nvPr/>
+        </p:nvSpPr>
+        <p:spPr>
+          <a:xfrm>
+            <a:off x="704088" y="8065008"/>
+            <a:ext cx="8915400" cy="228600"/>
+          </a:xfrm>
+          <a:prstGeom prst="rect">
+            <a:avLst/>
+          </a:prstGeom>
+          <a:noFill/>
+        </p:spPr>
+        <p:txBody>
+          <a:bodyPr wrap="none">
+            <a:spAutoFit/>
+          </a:bodyPr>
+          <a:lstStyle/>
+          <a:p>
+            <a:r>
+              <a:rPr sz="800">
+                <a:solidFill>
+                  <a:srgbClr val="000000"/>
+                </a:solidFill>
+              </a:rPr>
+              <a:t>Copyright © 2026 by Elephant Scale, All Rights Reserved</a:t>
+            </a:r>
+          </a:p>
+        </p:txBody>
+      </p:sp>
+      <p:pic>
+        <p:nvPicPr>
+          <p:cNvPr id="5" name="Picture 4" descr="1.png"/>
+          <p:cNvPicPr>
+            <a:picLocks noChangeAspect="1"/>
+          </p:cNvPicPr>
+          <p:nvPr/>
+        </p:nvPicPr>
+        <p:blipFill>
+          <a:blip r:embed="rId3"/>
+          <a:stretch>
+            <a:fillRect/>
+          </a:stretch>
+        </p:blipFill>
+        <p:spPr>
+          <a:xfrm>
+            <a:off x="0" y="1985569"/>
+            <a:ext cx="9258300" cy="2860967"/>
+          </a:xfrm>
+          <a:prstGeom prst="rect">
+            <a:avLst/>
+          </a:prstGeom>
+        </p:spPr>
+      </p:pic>
+    </p:spTree>
+  </p:cSld>
+  <p:clrMapOvr>
+    <a:masterClrMapping/>
+  </p:clrMapOvr>
+</p:sld>
+</file>
+
+<file path=ppt/slides/slide16.xml><?xml version="1.0" encoding="utf-8"?>
+<p:sld xmlns:a="http://schemas.openxmlformats.org/drawingml/2006/main" xmlns:r="http://schemas.openxmlformats.org/officeDocument/2006/relationships" xmlns:p="http://schemas.openxmlformats.org/presentationml/2006/main">
+  <p:cSld>
+    <p:spTree>
+      <p:nvGrpSpPr>
+        <p:cNvPr id="1" name=""/>
+        <p:cNvGrpSpPr/>
+        <p:nvPr/>
+      </p:nvGrpSpPr>
+      <p:grpSpPr>
+        <a:xfrm>
+          <a:off x="0" y="0"/>
+          <a:ext cx="0" cy="0"/>
+          <a:chOff x="0" y="0"/>
+          <a:chExt cx="0" cy="0"/>
+        </a:xfrm>
+      </p:grpSpPr>
+      <p:sp>
+        <p:nvSpPr>
+          <p:cNvPr id="2" name="Title 1"/>
+          <p:cNvSpPr>
+            <a:spLocks noGrp="1"/>
+          </p:cNvSpPr>
+          <p:nvPr>
+            <p:ph type="title"/>
+          </p:nvPr>
+        </p:nvSpPr>
+        <p:spPr/>
+        <p:txBody>
+          <a:bodyPr/>
+          <a:lstStyle/>
+          <a:p>
+            <a:r>
+              <a:t>Summary</a:t>
+            </a:r>
+          </a:p>
+        </p:txBody>
+      </p:sp>
+      <p:sp>
+        <p:nvSpPr>
+          <p:cNvPr id="3" name="Content Placeholder 2"/>
+          <p:cNvSpPr>
+            <a:spLocks noGrp="1"/>
+          </p:cNvSpPr>
+          <p:nvPr>
+            <p:ph idx="1"/>
+          </p:nvPr>
+        </p:nvSpPr>
+        <p:spPr/>
+        <p:txBody>
+          <a:bodyPr/>
+          <a:lstStyle/>
+          <a:p>
+            <a:r>
+              <a:t> The producer pipeline:</a:t>
+            </a:r>
+            <a:r>
+              <a:rPr b="1"/>
+              <a:t> serialize → partition → batch → send → ack → callback</a:t>
+            </a:r>
+          </a:p>
+          <a:p>
+            <a:r>
+              <a:rPr b="1"/>
+              <a:t> Keys</a:t>
+            </a:r>
+            <a:r>
+              <a:t> drive partitioning and per-partition</a:t>
+            </a:r>
+            <a:r>
+              <a:rPr b="1"/>
+              <a:t> ordering</a:t>
+            </a:r>
+            <a:r>
+              <a:t> — the key</a:t>
+            </a:r>
+            <a:r>
+              <a:rPr i="1"/>
+              <a:t> is</a:t>
+            </a:r>
+            <a:r>
+              <a:t> the ordering contract</a:t>
+            </a:r>
+          </a:p>
+          <a:p>
+            <a:r>
+              <a:rPr b="1" i="1"/>
+              <a:t> linger.ms</a:t>
+            </a:r>
+          </a:p>
+          <a:p>
+            <a:r>
+              <a:t> trade a little latency for large throughput gains</a:t>
+            </a:r>
+          </a:p>
+          <a:p>
+            <a:r>
+              <a:rPr b="1" i="1"/>
+              <a:t> acks=all</a:t>
+            </a:r>
+          </a:p>
+          <a:p>
+            <a:r>
+              <a:t> (with</a:t>
+            </a:r>
+            <a:r>
+              <a:rPr>
+                <a:latin typeface="Courier New"/>
+              </a:rPr>
+              <a:t> min.insync.replicas</a:t>
+            </a:r>
+            <a:r>
+              <a:t> ) is the durability baseline for real data</a:t>
+            </a:r>
+          </a:p>
+          <a:p>
+            <a:r>
+              <a:t> Plain retries give</a:t>
+            </a:r>
+            <a:r>
+              <a:rPr b="1"/>
+              <a:t> at-least-once</a:t>
+            </a:r>
+            <a:r>
+              <a:t> (possible duplicates);</a:t>
+            </a:r>
+          </a:p>
+          <a:p>
+            <a:r>
+              <a:rPr b="1" i="1"/>
+              <a:t> enable.idempotence</a:t>
+            </a:r>
+            <a:r>
+              <a:t> upgrades that to</a:t>
+            </a:r>
+            <a:r>
+              <a:rPr b="1"/>
+              <a:t> exactly-once to the broker</a:t>
+            </a:r>
+            <a:r>
+              <a:t> and preserves order</a:t>
+            </a:r>
+          </a:p>
+          <a:p>
+            <a:r>
+              <a:t> End-to-end exactly-once across a processing step needs</a:t>
+            </a:r>
+            <a:r>
+              <a:rPr b="1"/>
+              <a:t> transactions</a:t>
+            </a:r>
+            <a:r>
+              <a:t> — coming up</a:t>
+            </a:r>
+          </a:p>
+        </p:txBody>
+      </p:sp>
+      <p:sp>
+        <p:nvSpPr>
+          <p:cNvPr id="4" name="TextBox 3"/>
+          <p:cNvSpPr txBox="1"/>
+          <p:nvPr/>
+        </p:nvSpPr>
+        <p:spPr>
+          <a:xfrm>
+            <a:off x="704088" y="8065008"/>
+            <a:ext cx="8915400" cy="228600"/>
+          </a:xfrm>
+          <a:prstGeom prst="rect">
+            <a:avLst/>
+          </a:prstGeom>
+          <a:noFill/>
+        </p:spPr>
+        <p:txBody>
+          <a:bodyPr wrap="none">
+            <a:spAutoFit/>
+          </a:bodyPr>
+          <a:lstStyle/>
+          <a:p>
+            <a:r>
+              <a:rPr sz="800">
+                <a:solidFill>
+                  <a:srgbClr val="000000"/>
+                </a:solidFill>
+              </a:rPr>
+              <a:t>Copyright © 2026 by Elephant Scale, All Rights Reserved</a:t>
+            </a:r>
+          </a:p>
+        </p:txBody>
+      </p:sp>
+    </p:spTree>
+  </p:cSld>
+  <p:clrMapOvr>
+    <a:masterClrMapping/>
+  </p:clrMapOvr>
+</p:sld>
+</file>
+
+<file path=ppt/slides/slide2.xml><?xml version="1.0" encoding="utf-8"?>
+<p:sld xmlns:a="http://schemas.openxmlformats.org/drawingml/2006/main" xmlns:r="http://schemas.openxmlformats.org/officeDocument/2006/relationships" xmlns:p="http://schemas.openxmlformats.org/presentationml/2006/main">
+  <p:cSld>
+    <p:spTree>
+      <p:nvGrpSpPr>
+        <p:cNvPr id="1" name=""/>
+        <p:cNvGrpSpPr/>
+        <p:nvPr/>
+      </p:nvGrpSpPr>
+      <p:grpSpPr>
+        <a:xfrm>
+          <a:off x="0" y="0"/>
+          <a:ext cx="0" cy="0"/>
+          <a:chOff x="0" y="0"/>
+          <a:chExt cx="0" cy="0"/>
+        </a:xfrm>
+      </p:grpSpPr>
+      <p:sp>
+        <p:nvSpPr>
+          <p:cNvPr id="2" name="Title 1"/>
+          <p:cNvSpPr>
+            <a:spLocks noGrp="1"/>
+          </p:cNvSpPr>
+          <p:nvPr>
+            <p:ph type="title"/>
+          </p:nvPr>
+        </p:nvSpPr>
+        <p:spPr/>
+        <p:txBody>
+          <a:bodyPr/>
+          <a:lstStyle/>
+          <a:p>
+            <a:r>
+              <a:t>Agenda</a:t>
+            </a:r>
+          </a:p>
+        </p:txBody>
+      </p:sp>
+      <p:sp>
+        <p:nvSpPr>
+          <p:cNvPr id="3" name="Content Placeholder 2"/>
+          <p:cNvSpPr>
+            <a:spLocks noGrp="1"/>
+          </p:cNvSpPr>
+          <p:nvPr>
+            <p:ph idx="1"/>
+          </p:nvPr>
+        </p:nvSpPr>
+        <p:spPr/>
+        <p:txBody>
+          <a:bodyPr/>
+          <a:lstStyle/>
+          <a:p>
+            <a:r>
+              <a:t> Serialization; the partitioner (key-based vs. round-robin)</a:t>
+            </a:r>
+          </a:p>
+          <a:p>
+            <a:r>
+              <a:t> Batching,</a:t>
+            </a:r>
+            <a:r>
+              <a:rPr>
+                <a:latin typeface="Courier New"/>
+              </a:rPr>
+              <a:t> linger.ms</a:t>
+            </a:r>
+            <a:r>
+              <a:t> ,</a:t>
+            </a:r>
+            <a:r>
+              <a:rPr>
+                <a:latin typeface="Courier New"/>
+              </a:rPr>
+              <a:t> batch.size</a:t>
+            </a:r>
+            <a:r>
+              <a:t> , compression</a:t>
+            </a:r>
+          </a:p>
+          <a:p>
+            <a:r>
+              <a:t> Acknowledgements:</a:t>
+            </a:r>
+            <a:r>
+              <a:rPr>
+                <a:latin typeface="Courier New"/>
+              </a:rPr>
+              <a:t> acks=0/1/all</a:t>
+            </a:r>
+            <a:r>
+              <a:t> and durability trade-offs</a:t>
+            </a:r>
+          </a:p>
+          <a:p>
+            <a:r>
+              <a:t> Idempotent producers — exactly-once at the producer</a:t>
+            </a:r>
+          </a:p>
+        </p:txBody>
+      </p:sp>
+      <p:sp>
+        <p:nvSpPr>
+          <p:cNvPr id="4" name="TextBox 3"/>
+          <p:cNvSpPr txBox="1"/>
+          <p:nvPr/>
+        </p:nvSpPr>
+        <p:spPr>
+          <a:xfrm>
+            <a:off x="704088" y="8065008"/>
+            <a:ext cx="8915400" cy="228600"/>
+          </a:xfrm>
+          <a:prstGeom prst="rect">
+            <a:avLst/>
+          </a:prstGeom>
+          <a:noFill/>
+        </p:spPr>
+        <p:txBody>
+          <a:bodyPr wrap="none">
+            <a:spAutoFit/>
+          </a:bodyPr>
+          <a:lstStyle/>
+          <a:p>
+            <a:r>
+              <a:rPr sz="800">
+                <a:solidFill>
+                  <a:srgbClr val="000000"/>
+                </a:solidFill>
+              </a:rPr>
+              <a:t>Copyright © 2026 by Elephant Scale, All Rights Reserved</a:t>
+            </a:r>
+          </a:p>
+        </p:txBody>
+      </p:sp>
+    </p:spTree>
+  </p:cSld>
+  <p:clrMapOvr>
+    <a:masterClrMapping/>
+  </p:clrMapOvr>
+</p:sld>
+</file>
+
+<file path=ppt/slides/slide3.xml><?xml version="1.0" encoding="utf-8"?>
+<p:sld xmlns:a="http://schemas.openxmlformats.org/drawingml/2006/main" xmlns:r="http://schemas.openxmlformats.org/officeDocument/2006/relationships" xmlns:p="http://schemas.openxmlformats.org/presentationml/2006/main">
+  <p:cSld>
+    <p:spTree>
+      <p:nvGrpSpPr>
+        <p:cNvPr id="1" name=""/>
+        <p:cNvGrpSpPr/>
+        <p:nvPr/>
+      </p:nvGrpSpPr>
+      <p:grpSpPr>
+        <a:xfrm>
+          <a:off x="0" y="0"/>
+          <a:ext cx="0" cy="0"/>
+          <a:chOff x="0" y="0"/>
+          <a:chExt cx="0" cy="0"/>
+        </a:xfrm>
+      </p:grpSpPr>
+      <p:sp>
+        <p:nvSpPr>
+          <p:cNvPr id="2" name="Title 1"/>
+          <p:cNvSpPr>
+            <a:spLocks noGrp="1"/>
+          </p:cNvSpPr>
+          <p:nvPr>
+            <p:ph type="title"/>
+          </p:nvPr>
+        </p:nvSpPr>
+        <p:spPr/>
+        <p:txBody>
+          <a:bodyPr/>
+          <a:lstStyle/>
+          <a:p>
+            <a:r>
+              <a:t>What a Producer Actually Does</a:t>
+            </a:r>
+          </a:p>
+        </p:txBody>
+      </p:sp>
+      <p:sp>
+        <p:nvSpPr>
+          <p:cNvPr id="3" name="Content Placeholder 2"/>
+          <p:cNvSpPr>
+            <a:spLocks noGrp="1"/>
+          </p:cNvSpPr>
+          <p:nvPr>
+            <p:ph idx="1"/>
+          </p:nvPr>
+        </p:nvSpPr>
+        <p:spPr/>
+        <p:txBody>
+          <a:bodyPr/>
+          <a:lstStyle/>
+          <a:p>
+            <a:r>
+              <a:rPr dirty="0">
+                <a:latin typeface="Courier New"/>
+              </a:rPr>
+              <a:t> </a:t>
+            </a:r>
+            <a:r>
+              <a:rPr dirty="0" err="1">
+                <a:latin typeface="Courier New"/>
+              </a:rPr>
+              <a:t>producer.send</a:t>
+            </a:r>
+            <a:r>
+              <a:rPr dirty="0">
+                <a:latin typeface="Courier New"/>
+              </a:rPr>
+              <a:t>(...)</a:t>
+            </a:r>
+            <a:r>
+              <a:rPr dirty="0"/>
+              <a:t> looks instant, but a lot happens between your call and a durable record on a broker.</a:t>
+            </a:r>
+          </a:p>
+          <a:p>
+            <a:endParaRPr dirty="0"/>
+          </a:p>
+          <a:p>
+            <a:endParaRPr dirty="0"/>
+          </a:p>
+          <a:p>
+            <a:endParaRPr dirty="0"/>
+          </a:p>
+          <a:p>
+            <a:endParaRPr lang="en-US" dirty="0"/>
+          </a:p>
+          <a:p>
+            <a:endParaRPr lang="en-US" dirty="0"/>
+          </a:p>
+          <a:p>
+            <a:endParaRPr lang="en-US" dirty="0"/>
+          </a:p>
+          <a:p>
+            <a:endParaRPr lang="en-US" dirty="0"/>
+          </a:p>
+          <a:p>
+            <a:endParaRPr dirty="0"/>
+          </a:p>
+          <a:p>
+            <a:endParaRPr dirty="0"/>
+          </a:p>
+          <a:p>
+            <a:r>
+              <a:rPr dirty="0"/>
+              <a:t> The call is</a:t>
+            </a:r>
+            <a:r>
+              <a:rPr b="1" dirty="0"/>
+              <a:t> asynchronous</a:t>
+            </a:r>
+            <a:r>
+              <a:rPr dirty="0"/>
+              <a:t> — it returns before the broker has the record</a:t>
+            </a:r>
+          </a:p>
+          <a:p>
+            <a:r>
+              <a:rPr dirty="0"/>
+              <a:t> Understanding these stages is how you tune for</a:t>
+            </a:r>
+            <a:r>
+              <a:rPr b="1" dirty="0"/>
+              <a:t> throughput, latency, and durability</a:t>
+            </a:r>
+          </a:p>
+        </p:txBody>
+      </p:sp>
+      <p:sp>
+        <p:nvSpPr>
+          <p:cNvPr id="4" name="TextBox 3"/>
+          <p:cNvSpPr txBox="1"/>
+          <p:nvPr/>
+        </p:nvSpPr>
+        <p:spPr>
+          <a:xfrm>
+            <a:off x="704088" y="8065008"/>
+            <a:ext cx="8915400" cy="228600"/>
+          </a:xfrm>
+          <a:prstGeom prst="rect">
+            <a:avLst/>
+          </a:prstGeom>
+          <a:noFill/>
+        </p:spPr>
+        <p:txBody>
+          <a:bodyPr wrap="none">
+            <a:spAutoFit/>
+          </a:bodyPr>
+          <a:lstStyle/>
+          <a:p>
+            <a:r>
+              <a:rPr sz="800">
+                <a:solidFill>
+                  <a:srgbClr val="000000"/>
+                </a:solidFill>
+              </a:rPr>
+              <a:t>Copyright © 2026 by Elephant Scale, All Rights Reserved</a:t>
+            </a:r>
+          </a:p>
+        </p:txBody>
+      </p:sp>
+      <p:pic>
+        <p:nvPicPr>
+          <p:cNvPr id="5" name="Picture 4" descr="1.png"/>
+          <p:cNvPicPr>
+            <a:picLocks noChangeAspect="1"/>
+          </p:cNvPicPr>
+          <p:nvPr/>
+        </p:nvPicPr>
+        <p:blipFill>
+          <a:blip r:embed="rId3"/>
+          <a:stretch>
+            <a:fillRect/>
+          </a:stretch>
+        </p:blipFill>
+        <p:spPr>
+          <a:xfrm>
+            <a:off x="232267" y="1862931"/>
+            <a:ext cx="8636000" cy="3454400"/>
+          </a:xfrm>
+          <a:prstGeom prst="rect">
+            <a:avLst/>
+          </a:prstGeom>
+        </p:spPr>
+      </p:pic>
+    </p:spTree>
+  </p:cSld>
+  <p:clrMapOvr>
+    <a:masterClrMapping/>
+  </p:clrMapOvr>
+</p:sld>
+</file>
+
+<file path=ppt/slides/slide4.xml><?xml version="1.0" encoding="utf-8"?>
+<p:sld xmlns:a="http://schemas.openxmlformats.org/drawingml/2006/main" xmlns:r="http://schemas.openxmlformats.org/officeDocument/2006/relationships" xmlns:p="http://schemas.openxmlformats.org/presentationml/2006/main">
+  <p:cSld>
+    <p:spTree>
+      <p:nvGrpSpPr>
+        <p:cNvPr id="1" name=""/>
+        <p:cNvGrpSpPr/>
+        <p:nvPr/>
+      </p:nvGrpSpPr>
+      <p:grpSpPr>
+        <a:xfrm>
+          <a:off x="0" y="0"/>
+          <a:ext cx="0" cy="0"/>
+          <a:chOff x="0" y="0"/>
+          <a:chExt cx="0" cy="0"/>
+        </a:xfrm>
+      </p:grpSpPr>
+      <p:sp>
+        <p:nvSpPr>
+          <p:cNvPr id="2" name="Title 1"/>
+          <p:cNvSpPr>
+            <a:spLocks noGrp="1"/>
+          </p:cNvSpPr>
+          <p:nvPr>
+            <p:ph type="title"/>
+          </p:nvPr>
+        </p:nvSpPr>
+        <p:spPr/>
+        <p:txBody>
+          <a:bodyPr/>
+          <a:lstStyle/>
+          <a:p>
+            <a:r>
+              <a:t>Stage 1: Serialization</a:t>
+            </a:r>
+          </a:p>
+        </p:txBody>
+      </p:sp>
+      <p:sp>
+        <p:nvSpPr>
+          <p:cNvPr id="3" name="Content Placeholder 2"/>
+          <p:cNvSpPr>
+            <a:spLocks noGrp="1"/>
+          </p:cNvSpPr>
+          <p:nvPr>
+            <p:ph idx="1"/>
+          </p:nvPr>
+        </p:nvSpPr>
+        <p:spPr/>
+        <p:txBody>
+          <a:bodyPr/>
+          <a:lstStyle/>
+          <a:p>
+            <a:r>
+              <a:t> Kafka stores</a:t>
+            </a:r>
+            <a:r>
+              <a:rPr b="1"/>
+              <a:t> bytes</a:t>
+            </a:r>
+            <a:r>
+              <a:t> . Your keys and values must be turned into bytes on the way in.</a:t>
+            </a:r>
+          </a:p>
+          <a:p>
+            <a:r>
+              <a:t> The producer needs a</a:t>
+            </a:r>
+            <a:r>
+              <a:rPr b="1"/>
+              <a:t> serializer</a:t>
+            </a:r>
+            <a:r>
+              <a:t> for the key and one for the value</a:t>
+            </a:r>
+          </a:p>
+          <a:p>
+            <a:r>
+              <a:t> Common choices: strings, JSON, and — with the Schema Registry —</a:t>
+            </a:r>
+            <a:r>
+              <a:rPr b="1"/>
+              <a:t> Avro / Protobuf</a:t>
+            </a:r>
+            <a:r>
+              <a:t> (Module 8)</a:t>
+            </a:r>
+          </a:p>
+          <a:p>
+            <a:r>
+              <a:t> Consumers must use a</a:t>
+            </a:r>
+            <a:r>
+              <a:rPr b="1"/>
+              <a:t> matching deserializer</a:t>
+            </a:r>
+            <a:r>
+              <a:t> , or they read garbage</a:t>
+            </a:r>
+          </a:p>
+          <a:p>
+            <a:endParaRPr/>
+          </a:p>
+          <a:p>
+            <a:endParaRPr/>
+          </a:p>
+          <a:p>
+            <a:endParaRPr/>
+          </a:p>
+          <a:p>
+            <a:endParaRPr/>
+          </a:p>
+        </p:txBody>
+      </p:sp>
+      <p:sp>
+        <p:nvSpPr>
+          <p:cNvPr id="4" name="TextBox 3"/>
+          <p:cNvSpPr txBox="1"/>
+          <p:nvPr/>
+        </p:nvSpPr>
+        <p:spPr>
+          <a:xfrm>
+            <a:off x="704088" y="8065008"/>
+            <a:ext cx="8915400" cy="228600"/>
+          </a:xfrm>
+          <a:prstGeom prst="rect">
+            <a:avLst/>
+          </a:prstGeom>
+          <a:noFill/>
+        </p:spPr>
+        <p:txBody>
+          <a:bodyPr wrap="none">
+            <a:spAutoFit/>
+          </a:bodyPr>
+          <a:lstStyle/>
+          <a:p>
+            <a:r>
+              <a:rPr sz="800">
+                <a:solidFill>
+                  <a:srgbClr val="000000"/>
+                </a:solidFill>
+              </a:rPr>
+              <a:t>Copyright © 2026 by Elephant Scale, All Rights Reserved</a:t>
+            </a:r>
+          </a:p>
+        </p:txBody>
+      </p:sp>
+      <p:pic>
+        <p:nvPicPr>
+          <p:cNvPr id="5" name="Picture 4" descr="1.png"/>
+          <p:cNvPicPr>
+            <a:picLocks noChangeAspect="1"/>
+          </p:cNvPicPr>
+          <p:nvPr/>
+        </p:nvPicPr>
+        <p:blipFill>
+          <a:blip r:embed="rId3"/>
+          <a:stretch>
+            <a:fillRect/>
+          </a:stretch>
+        </p:blipFill>
+        <p:spPr>
+          <a:xfrm>
+            <a:off x="0" y="4409201"/>
+            <a:ext cx="8915400" cy="2056770"/>
+          </a:xfrm>
+          <a:prstGeom prst="rect">
+            <a:avLst/>
+          </a:prstGeom>
+        </p:spPr>
+      </p:pic>
+    </p:spTree>
+  </p:cSld>
+  <p:clrMapOvr>
+    <a:masterClrMapping/>
+  </p:clrMapOvr>
+</p:sld>
+</file>
+
+<file path=ppt/slides/slide5.xml><?xml version="1.0" encoding="utf-8"?>
+<p:sld xmlns:a="http://schemas.openxmlformats.org/drawingml/2006/main" xmlns:r="http://schemas.openxmlformats.org/officeDocument/2006/relationships" xmlns:p="http://schemas.openxmlformats.org/presentationml/2006/main">
+  <p:cSld>
+    <p:spTree>
+      <p:nvGrpSpPr>
+        <p:cNvPr id="1" name=""/>
+        <p:cNvGrpSpPr/>
+        <p:nvPr/>
+      </p:nvGrpSpPr>
+      <p:grpSpPr>
+        <a:xfrm>
+          <a:off x="0" y="0"/>
+          <a:ext cx="0" cy="0"/>
+          <a:chOff x="0" y="0"/>
+          <a:chExt cx="0" cy="0"/>
+        </a:xfrm>
+      </p:grpSpPr>
+      <p:sp>
+        <p:nvSpPr>
+          <p:cNvPr id="2" name="Title 1"/>
+          <p:cNvSpPr>
+            <a:spLocks noGrp="1"/>
+          </p:cNvSpPr>
+          <p:nvPr>
+            <p:ph type="title"/>
+          </p:nvPr>
+        </p:nvSpPr>
+        <p:spPr/>
+        <p:txBody>
+          <a:bodyPr/>
+          <a:lstStyle/>
+          <a:p>
+            <a:r>
+              <a:t>Stage 2: The Partitioner</a:t>
+            </a:r>
+          </a:p>
+        </p:txBody>
+      </p:sp>
+      <p:sp>
+        <p:nvSpPr>
+          <p:cNvPr id="3" name="Content Placeholder 2"/>
+          <p:cNvSpPr>
+            <a:spLocks noGrp="1"/>
+          </p:cNvSpPr>
+          <p:nvPr>
+            <p:ph idx="1"/>
+          </p:nvPr>
+        </p:nvSpPr>
+        <p:spPr/>
+        <p:txBody>
+          <a:bodyPr/>
+          <a:lstStyle/>
+          <a:p>
+            <a:r>
+              <a:rPr dirty="0"/>
+              <a:t> The producer must pick</a:t>
+            </a:r>
+            <a:r>
+              <a:rPr b="1" dirty="0"/>
+              <a:t> which partition</a:t>
+            </a:r>
+            <a:r>
+              <a:rPr dirty="0"/>
+              <a:t> each record goes to. That's the</a:t>
+            </a:r>
+            <a:r>
+              <a:rPr b="1" dirty="0"/>
+              <a:t> partitioner</a:t>
+            </a:r>
+            <a:r>
+              <a:rPr dirty="0"/>
+              <a:t> .</a:t>
+            </a:r>
+          </a:p>
+          <a:p>
+            <a:r>
+              <a:rPr b="1" dirty="0"/>
+              <a:t> Key present</a:t>
+            </a:r>
+            <a:r>
+              <a:rPr dirty="0"/>
+              <a:t> →</a:t>
+            </a:r>
+            <a:r>
+              <a:rPr dirty="0">
+                <a:latin typeface="Courier New"/>
+              </a:rPr>
+              <a:t> hash(key) % partitions</a:t>
+            </a:r>
+            <a:r>
+              <a:rPr dirty="0"/>
+              <a:t> → same key always → same partition (</a:t>
+            </a:r>
+            <a:r>
+              <a:rPr b="1" dirty="0"/>
+              <a:t> ordering</a:t>
+            </a:r>
+            <a:r>
+              <a:rPr dirty="0"/>
+              <a:t> )</a:t>
+            </a:r>
+          </a:p>
+          <a:p>
+            <a:r>
+              <a:rPr b="1" dirty="0"/>
+              <a:t> No key</a:t>
+            </a:r>
+            <a:r>
+              <a:rPr dirty="0"/>
+              <a:t> → spread across partitions for even load (sticky batching, round-robin-</a:t>
+            </a:r>
+            <a:r>
+              <a:rPr dirty="0" err="1"/>
+              <a:t>ish</a:t>
+            </a:r>
+            <a:r>
+              <a:rPr dirty="0"/>
+              <a:t>)</a:t>
+            </a:r>
+          </a:p>
+          <a:p>
+            <a:r>
+              <a:rPr dirty="0"/>
+              <a:t> You can supply a</a:t>
+            </a:r>
+            <a:r>
+              <a:rPr b="1" dirty="0"/>
+              <a:t> custom partitioner</a:t>
+            </a:r>
+            <a:r>
+              <a:rPr dirty="0"/>
+              <a:t> for special routing, but rarely need to</a:t>
+            </a:r>
+          </a:p>
+          <a:p>
+            <a:endParaRPr lang="en-US" dirty="0"/>
+          </a:p>
+          <a:p>
+            <a:endParaRPr lang="en-US" dirty="0"/>
+          </a:p>
+          <a:p>
+            <a:endParaRPr lang="en-US" dirty="0"/>
+          </a:p>
+          <a:p>
+            <a:endParaRPr dirty="0"/>
+          </a:p>
+          <a:p>
+            <a:r>
+              <a:rPr b="1" dirty="0"/>
+              <a:t> Design rule:</a:t>
+            </a:r>
+            <a:r>
+              <a:rPr dirty="0"/>
+              <a:t> choose a key when you need per-entity ordering; go keyless for maximum spread. This is the single most important producer decision.</a:t>
             </a:r>
           </a:p>
         </p:txBody>
@@ -3755,8 +5079,8 @@
         </p:blipFill>
         <p:spPr>
           <a:xfrm>
-            <a:off x="0" y="1353312"/>
-            <a:ext cx="8915400" cy="476513"/>
+            <a:off x="-28083" y="4409201"/>
+            <a:ext cx="9398000" cy="1054100"/>
           </a:xfrm>
           <a:prstGeom prst="rect">
             <a:avLst/>
@@ -3771,8 +5095,8 @@
 </p:sld>
 </file>
 
-<file path=ppt/slides/slide14.xml><?xml version="1.0" encoding="utf-8"?>
-<p:sld xmlns:a="http://schemas.openxmlformats.org/drawingml/2006/main" xmlns:p="http://schemas.openxmlformats.org/presentationml/2006/main" xmlns:r="http://schemas.openxmlformats.org/officeDocument/2006/relationships">
+<file path=ppt/slides/slide6.xml><?xml version="1.0" encoding="utf-8"?>
+<p:sld xmlns:a="http://schemas.openxmlformats.org/drawingml/2006/main" xmlns:r="http://schemas.openxmlformats.org/officeDocument/2006/relationships" xmlns:p="http://schemas.openxmlformats.org/presentationml/2006/main">
   <p:cSld>
     <p:spTree>
       <p:nvGrpSpPr>
@@ -3780,7 +5104,14 @@
         <p:cNvGrpSpPr/>
         <p:nvPr/>
       </p:nvGrpSpPr>
-      <p:grpSpPr/>
+      <p:grpSpPr>
+        <a:xfrm>
+          <a:off x="0" y="0"/>
+          <a:ext cx="0" cy="0"/>
+          <a:chOff x="0" y="0"/>
+          <a:chExt cx="0" cy="0"/>
+        </a:xfrm>
+      </p:grpSpPr>
       <p:sp>
         <p:nvSpPr>
           <p:cNvPr id="2" name="Title 1"/>
@@ -3797,7 +5128,7 @@
           <a:lstStyle/>
           <a:p>
             <a:r>
-              <a:t>What Idempotence Does and Doesn't Cover</a:t>
+              <a:t>Ordering: The Guarantee and Its Limits</a:t>
             </a:r>
           </a:p>
         </p:txBody>
@@ -3818,92 +5149,43 @@
           <a:lstStyle/>
           <a:p>
             <a:r>
-              <a:t> Be precise about the guarantee — it's a common interview and production trap.</a:t>
-            </a:r>
-          </a:p>
-          <a:p>
-            <a:r>
-              <a:t> ✅ De-dupes</a:t>
+              <a:t> Kafka guarantees order</a:t>
             </a:r>
             <a:r>
               <a:rPr b="1"/>
-              <a:t> this producer's retries</a:t>
-            </a:r>
-            <a:r>
-              <a:t> to a partition → no duplicates from resend</a:t>
-            </a:r>
-          </a:p>
-          <a:p>
-            <a:r>
-              <a:t> ✅ Preserves</a:t>
+              <a:t> within a partition</a:t>
+            </a:r>
+            <a:r>
+              <a:t> , never across partitions.</a:t>
+            </a:r>
+          </a:p>
+          <a:p>
+            <a:r>
+              <a:t> All records with the same key share a partition → ordered relative to each other</a:t>
+            </a:r>
+          </a:p>
+          <a:p>
+            <a:r>
+              <a:t> Records with different keys may be in different partitions →</a:t>
             </a:r>
             <a:r>
               <a:rPr b="1"/>
-              <a:t> ordering</a:t>
-            </a:r>
-            <a:r>
-              <a:t> even with retries and multiple in-flight batches</a:t>
-            </a:r>
-          </a:p>
-          <a:p>
-            <a:r>
-              <a:t> ❌ Does</a:t>
-            </a:r>
-            <a:r>
-              <a:rPr b="1"/>
-              <a:t> not</a:t>
-            </a:r>
-            <a:r>
-              <a:t> de-dupe if</a:t>
-            </a:r>
-            <a:r>
-              <a:rPr i="1"/>
-              <a:t> your application</a:t>
-            </a:r>
-            <a:r>
-              <a:t> calls</a:t>
-            </a:r>
-            <a:r>
-              <a:rPr>
-                <a:latin typeface="Courier New"/>
-              </a:rPr>
-              <a:t> send()</a:t>
-            </a:r>
-            <a:r>
-              <a:t> twice for the same event</a:t>
-            </a:r>
-          </a:p>
-          <a:p>
-            <a:r>
-              <a:t> ❌ Does</a:t>
-            </a:r>
-            <a:r>
-              <a:rPr b="1"/>
-              <a:t> not</a:t>
-            </a:r>
-            <a:r>
-              <a:t> span</a:t>
-            </a:r>
-            <a:r>
-              <a:rPr b="1"/>
-              <a:t> multiple partitions or a consume-process-produce loop</a:t>
-            </a:r>
-            <a:r>
-              <a:t> — that needs</a:t>
-            </a:r>
-            <a:r>
-              <a:rPr b="1"/>
-              <a:t> transactions</a:t>
-            </a:r>
-            <a:r>
-              <a:t> (Module 7 / Delivery Semantics)</a:t>
-            </a:r>
-          </a:p>
-          <a:p>
-            <a:r>
-              <a:rPr b="1"/>
-              <a:t> Idempotence = exactly-once</a:t>
-            </a:r>
+              <a:t> no</a:t>
+            </a:r>
+            <a:r>
+              <a:t> cross-partition order</a:t>
+            </a:r>
+          </a:p>
+          <a:p>
+            <a:r>
+              <a:t> Pick your key to match your ordering requirement (per user, per order, per device)</a:t>
+            </a:r>
+          </a:p>
+          <a:p>
+            <a:endParaRPr/>
+          </a:p>
+          <a:p>
+            <a:endParaRPr/>
           </a:p>
         </p:txBody>
       </p:sp>
@@ -3940,6 +5222,30 @@
           </a:p>
         </p:txBody>
       </p:sp>
+      <p:pic>
+        <p:nvPicPr>
+          <p:cNvPr id="5" name="Picture 4" descr="1.png"/>
+          <p:cNvPicPr>
+            <a:picLocks noChangeAspect="1"/>
+          </p:cNvPicPr>
+          <p:nvPr/>
+        </p:nvPicPr>
+        <p:blipFill>
+          <a:blip r:embed="rId3"/>
+          <a:stretch>
+            <a:fillRect/>
+          </a:stretch>
+        </p:blipFill>
+        <p:spPr>
+          <a:xfrm>
+            <a:off x="63500" y="4606131"/>
+            <a:ext cx="9245600" cy="1054100"/>
+          </a:xfrm>
+          <a:prstGeom prst="rect">
+            <a:avLst/>
+          </a:prstGeom>
+        </p:spPr>
+      </p:pic>
     </p:spTree>
   </p:cSld>
   <p:clrMapOvr>
@@ -3948,8 +5254,8 @@
 </p:sld>
 </file>
 
-<file path=ppt/slides/slide15.xml><?xml version="1.0" encoding="utf-8"?>
-<p:sld xmlns:a="http://schemas.openxmlformats.org/drawingml/2006/main" xmlns:p="http://schemas.openxmlformats.org/presentationml/2006/main" xmlns:r="http://schemas.openxmlformats.org/officeDocument/2006/relationships">
+<file path=ppt/slides/slide7.xml><?xml version="1.0" encoding="utf-8"?>
+<p:sld xmlns:a="http://schemas.openxmlformats.org/drawingml/2006/main" xmlns:r="http://schemas.openxmlformats.org/officeDocument/2006/relationships" xmlns:p="http://schemas.openxmlformats.org/presentationml/2006/main">
   <p:cSld>
     <p:spTree>
       <p:nvGrpSpPr>
@@ -3957,7 +5263,14 @@
         <p:cNvGrpSpPr/>
         <p:nvPr/>
       </p:nvGrpSpPr>
-      <p:grpSpPr/>
+      <p:grpSpPr>
+        <a:xfrm>
+          <a:off x="0" y="0"/>
+          <a:ext cx="0" cy="0"/>
+          <a:chOff x="0" y="0"/>
+          <a:chExt cx="0" cy="0"/>
+        </a:xfrm>
+      </p:grpSpPr>
       <p:sp>
         <p:nvSpPr>
           <p:cNvPr id="2" name="Title 1"/>
@@ -3974,7 +5287,7 @@
           <a:lstStyle/>
           <a:p>
             <a:r>
-              <a:t>A Tuned Producer, End to End</a:t>
+              <a:t>Stage 3: Batching</a:t>
             </a:r>
           </a:p>
         </p:txBody>
@@ -3995,15 +5308,133 @@
           <a:lstStyle/>
           <a:p>
             <a:r>
-              <a:t> Putting the pipeline together — a sensible production baseline:</a:t>
-            </a:r>
-          </a:p>
-          <a:p/>
-          <a:p/>
-          <a:p/>
-          <a:p/>
-          <a:p/>
-          <a:p/>
+              <a:rPr dirty="0"/>
+              <a:t> The producer does</a:t>
+            </a:r>
+            <a:r>
+              <a:rPr b="1" dirty="0"/>
+              <a:t> not</a:t>
+            </a:r>
+            <a:r>
+              <a:rPr dirty="0"/>
+              <a:t> send one record per request. It</a:t>
+            </a:r>
+            <a:r>
+              <a:rPr b="1" dirty="0"/>
+              <a:t> batches</a:t>
+            </a:r>
+            <a:r>
+              <a:rPr dirty="0"/>
+              <a:t> records per partition, which is where its throughput comes from.</a:t>
+            </a:r>
+          </a:p>
+          <a:p>
+            <a:r>
+              <a:rPr dirty="0"/>
+              <a:t> Two knobs decide when a batch is sent:</a:t>
+            </a:r>
+          </a:p>
+          <a:p>
+            <a:r>
+              <a:rPr b="1" i="1" dirty="0"/>
+              <a:t> </a:t>
+            </a:r>
+            <a:r>
+              <a:rPr b="1" i="1" dirty="0" err="1"/>
+              <a:t>batch.size</a:t>
+            </a:r>
+            <a:endParaRPr b="1" i="1" dirty="0"/>
+          </a:p>
+          <a:p>
+            <a:r>
+              <a:rPr dirty="0"/>
+              <a:t> — max bytes per batch (per partition). Full batch → send now.</a:t>
+            </a:r>
+          </a:p>
+          <a:p>
+            <a:r>
+              <a:rPr b="1" i="1" dirty="0"/>
+              <a:t> </a:t>
+            </a:r>
+            <a:r>
+              <a:rPr b="1" i="1" dirty="0" err="1"/>
+              <a:t>linger.ms</a:t>
+            </a:r>
+            <a:endParaRPr b="1" i="1" dirty="0"/>
+          </a:p>
+          <a:p>
+            <a:r>
+              <a:rPr dirty="0"/>
+              <a:t> — how long to</a:t>
+            </a:r>
+            <a:r>
+              <a:rPr i="1" dirty="0"/>
+              <a:t> wait</a:t>
+            </a:r>
+            <a:r>
+              <a:rPr dirty="0"/>
+              <a:t> for more records before sending a partial batch.</a:t>
+            </a:r>
+          </a:p>
+          <a:p>
+            <a:endParaRPr lang="en-US" dirty="0"/>
+          </a:p>
+          <a:p>
+            <a:endParaRPr lang="en-US" dirty="0"/>
+          </a:p>
+          <a:p>
+            <a:endParaRPr dirty="0"/>
+          </a:p>
+          <a:p>
+            <a:r>
+              <a:rPr b="1" dirty="0"/>
+              <a:t> The trade-off:</a:t>
+            </a:r>
+            <a:r>
+              <a:rPr dirty="0"/>
+              <a:t> a little</a:t>
+            </a:r>
+            <a:r>
+              <a:rPr dirty="0">
+                <a:latin typeface="Courier New"/>
+              </a:rPr>
+              <a:t> </a:t>
+            </a:r>
+            <a:r>
+              <a:rPr dirty="0" err="1">
+                <a:latin typeface="Courier New"/>
+              </a:rPr>
+              <a:t>linger.ms</a:t>
+            </a:r>
+            <a:r>
+              <a:rPr dirty="0"/>
+              <a:t> dramatically improves throughput under load, at the cost of a few </a:t>
+            </a:r>
+            <a:r>
+              <a:rPr dirty="0" err="1"/>
+              <a:t>ms</a:t>
+            </a:r>
+            <a:r>
+              <a:rPr dirty="0"/>
+              <a:t> of latency. Default</a:t>
+            </a:r>
+            <a:r>
+              <a:rPr dirty="0">
+                <a:latin typeface="Courier New"/>
+              </a:rPr>
+              <a:t> </a:t>
+            </a:r>
+            <a:r>
+              <a:rPr dirty="0" err="1">
+                <a:latin typeface="Courier New"/>
+              </a:rPr>
+              <a:t>linger.ms</a:t>
+            </a:r>
+            <a:r>
+              <a:rPr dirty="0"/>
+              <a:t> is small; raise it to batch harder.</a:t>
+            </a:r>
+          </a:p>
         </p:txBody>
       </p:sp>
       <p:sp>
@@ -4055,1190 +5486,7 @@
         </p:blipFill>
         <p:spPr>
           <a:xfrm>
-            <a:off x="0" y="1792224"/>
-            <a:ext cx="8915400" cy="2755005"/>
-          </a:xfrm>
-          <a:prstGeom prst="rect">
-            <a:avLst/>
-          </a:prstGeom>
-        </p:spPr>
-      </p:pic>
-    </p:spTree>
-  </p:cSld>
-  <p:clrMapOvr>
-    <a:masterClrMapping/>
-  </p:clrMapOvr>
-</p:sld>
-</file>
-
-<file path=ppt/slides/slide16.xml><?xml version="1.0" encoding="utf-8"?>
-<p:sld xmlns:a="http://schemas.openxmlformats.org/drawingml/2006/main" xmlns:p="http://schemas.openxmlformats.org/presentationml/2006/main" xmlns:r="http://schemas.openxmlformats.org/officeDocument/2006/relationships">
-  <p:cSld>
-    <p:spTree>
-      <p:nvGrpSpPr>
-        <p:cNvPr id="1" name=""/>
-        <p:cNvGrpSpPr/>
-        <p:nvPr/>
-      </p:nvGrpSpPr>
-      <p:grpSpPr/>
-      <p:sp>
-        <p:nvSpPr>
-          <p:cNvPr id="2" name="Title 1"/>
-          <p:cNvSpPr>
-            <a:spLocks noGrp="1"/>
-          </p:cNvSpPr>
-          <p:nvPr>
-            <p:ph type="title"/>
-          </p:nvPr>
-        </p:nvSpPr>
-        <p:spPr/>
-        <p:txBody>
-          <a:bodyPr/>
-          <a:lstStyle/>
-          <a:p>
-            <a:r>
-              <a:t>Summary</a:t>
-            </a:r>
-          </a:p>
-        </p:txBody>
-      </p:sp>
-      <p:sp>
-        <p:nvSpPr>
-          <p:cNvPr id="3" name="Content Placeholder 2"/>
-          <p:cNvSpPr>
-            <a:spLocks noGrp="1"/>
-          </p:cNvSpPr>
-          <p:nvPr>
-            <p:ph idx="1"/>
-          </p:nvPr>
-        </p:nvSpPr>
-        <p:spPr/>
-        <p:txBody>
-          <a:bodyPr/>
-          <a:lstStyle/>
-          <a:p>
-            <a:r>
-              <a:t> The producer pipeline:</a:t>
-            </a:r>
-            <a:r>
-              <a:rPr b="1"/>
-              <a:t> serialize → partition → batch → send → ack → callback</a:t>
-            </a:r>
-          </a:p>
-          <a:p>
-            <a:r>
-              <a:rPr b="1"/>
-              <a:t> Keys</a:t>
-            </a:r>
-            <a:r>
-              <a:t> drive partitioning and per-partition</a:t>
-            </a:r>
-            <a:r>
-              <a:rPr b="1"/>
-              <a:t> ordering</a:t>
-            </a:r>
-            <a:r>
-              <a:t> — the key</a:t>
-            </a:r>
-            <a:r>
-              <a:rPr i="1"/>
-              <a:t> is</a:t>
-            </a:r>
-            <a:r>
-              <a:t> the ordering contract</a:t>
-            </a:r>
-          </a:p>
-          <a:p>
-            <a:r>
-              <a:rPr i="1" b="1"/>
-              <a:t> linger.ms</a:t>
-            </a:r>
-          </a:p>
-          <a:p>
-            <a:r>
-              <a:t> trade a little latency for large throughput gains</a:t>
-            </a:r>
-          </a:p>
-          <a:p>
-            <a:r>
-              <a:rPr i="1" b="1"/>
-              <a:t> acks=all</a:t>
-            </a:r>
-          </a:p>
-          <a:p>
-            <a:r>
-              <a:t> (with</a:t>
-            </a:r>
-            <a:r>
-              <a:rPr>
-                <a:latin typeface="Courier New"/>
-              </a:rPr>
-              <a:t> min.insync.replicas</a:t>
-            </a:r>
-            <a:r>
-              <a:t> ) is the durability baseline for real data</a:t>
-            </a:r>
-          </a:p>
-          <a:p>
-            <a:r>
-              <a:t> Plain retries give</a:t>
-            </a:r>
-            <a:r>
-              <a:rPr b="1"/>
-              <a:t> at-least-once</a:t>
-            </a:r>
-            <a:r>
-              <a:t> (possible duplicates);</a:t>
-            </a:r>
-          </a:p>
-          <a:p>
-            <a:r>
-              <a:rPr i="1" b="1"/>
-              <a:t> enable.idempotence</a:t>
-            </a:r>
-            <a:r>
-              <a:t> upgrades</a:t>
-            </a:r>
-            <a:r>
-              <a:t> that to</a:t>
-            </a:r>
-            <a:r>
-              <a:rPr b="1"/>
-              <a:t> exactly-once to the broker</a:t>
-            </a:r>
-            <a:r>
-              <a:t> and preserves order</a:t>
-            </a:r>
-          </a:p>
-          <a:p>
-            <a:r>
-              <a:t> End-to-end exactly-once across a processing step needs</a:t>
-            </a:r>
-            <a:r>
-              <a:rPr b="1"/>
-              <a:t> transactions</a:t>
-            </a:r>
-            <a:r>
-              <a:t> — coming up</a:t>
-            </a:r>
-          </a:p>
-        </p:txBody>
-      </p:sp>
-      <p:sp>
-        <p:nvSpPr>
-          <p:cNvPr id="4" name="TextBox 3"/>
-          <p:cNvSpPr txBox="1"/>
-          <p:nvPr/>
-        </p:nvSpPr>
-        <p:spPr>
-          <a:xfrm>
-            <a:off x="704088" y="8065008"/>
-            <a:ext cx="8915400" cy="228600"/>
-          </a:xfrm>
-          <a:prstGeom prst="rect">
-            <a:avLst/>
-          </a:prstGeom>
-          <a:noFill/>
-        </p:spPr>
-        <p:txBody>
-          <a:bodyPr wrap="none">
-            <a:spAutoFit/>
-          </a:bodyPr>
-          <a:lstStyle/>
-          <a:p>
-            <a:r>
-              <a:rPr sz="800">
-                <a:solidFill>
-                  <a:srgbClr val="000000"/>
-                </a:solidFill>
-              </a:rPr>
-              <a:t>Copyright © 2026 by Elephant Scale, All Rights Reserved</a:t>
-            </a:r>
-          </a:p>
-        </p:txBody>
-      </p:sp>
-    </p:spTree>
-  </p:cSld>
-  <p:clrMapOvr>
-    <a:masterClrMapping/>
-  </p:clrMapOvr>
-</p:sld>
-</file>
-
-<file path=ppt/slides/slide2.xml><?xml version="1.0" encoding="utf-8"?>
-<p:sld xmlns:a="http://schemas.openxmlformats.org/drawingml/2006/main" xmlns:p="http://schemas.openxmlformats.org/presentationml/2006/main" xmlns:r="http://schemas.openxmlformats.org/officeDocument/2006/relationships">
-  <p:cSld>
-    <p:spTree>
-      <p:nvGrpSpPr>
-        <p:cNvPr id="1" name=""/>
-        <p:cNvGrpSpPr/>
-        <p:nvPr/>
-      </p:nvGrpSpPr>
-      <p:grpSpPr/>
-      <p:sp>
-        <p:nvSpPr>
-          <p:cNvPr id="2" name="Title 1"/>
-          <p:cNvSpPr>
-            <a:spLocks noGrp="1"/>
-          </p:cNvSpPr>
-          <p:nvPr>
-            <p:ph type="title"/>
-          </p:nvPr>
-        </p:nvSpPr>
-        <p:spPr/>
-        <p:txBody>
-          <a:bodyPr/>
-          <a:lstStyle/>
-          <a:p>
-            <a:r>
-              <a:t>Agenda</a:t>
-            </a:r>
-          </a:p>
-        </p:txBody>
-      </p:sp>
-      <p:sp>
-        <p:nvSpPr>
-          <p:cNvPr id="3" name="Content Placeholder 2"/>
-          <p:cNvSpPr>
-            <a:spLocks noGrp="1"/>
-          </p:cNvSpPr>
-          <p:nvPr>
-            <p:ph idx="1"/>
-          </p:nvPr>
-        </p:nvSpPr>
-        <p:spPr/>
-        <p:txBody>
-          <a:bodyPr/>
-          <a:lstStyle/>
-          <a:p>
-            <a:r>
-              <a:t> Serialization; the partitioner (key-based vs. round-robin)</a:t>
-            </a:r>
-          </a:p>
-          <a:p>
-            <a:r>
-              <a:t> Batching,</a:t>
-            </a:r>
-            <a:r>
-              <a:rPr>
-                <a:latin typeface="Courier New"/>
-              </a:rPr>
-              <a:t> linger.ms</a:t>
-            </a:r>
-            <a:r>
-              <a:t> ,</a:t>
-            </a:r>
-            <a:r>
-              <a:rPr>
-                <a:latin typeface="Courier New"/>
-              </a:rPr>
-              <a:t> batch.size</a:t>
-            </a:r>
-            <a:r>
-              <a:t> , compression</a:t>
-            </a:r>
-          </a:p>
-          <a:p>
-            <a:r>
-              <a:t> Acknowledgements:</a:t>
-            </a:r>
-            <a:r>
-              <a:rPr>
-                <a:latin typeface="Courier New"/>
-              </a:rPr>
-              <a:t> acks=0/1/all</a:t>
-            </a:r>
-            <a:r>
-              <a:t> and durability trade-offs</a:t>
-            </a:r>
-          </a:p>
-          <a:p>
-            <a:r>
-              <a:t> Idempotent producers — exactly-once at the producer</a:t>
-            </a:r>
-          </a:p>
-        </p:txBody>
-      </p:sp>
-      <p:sp>
-        <p:nvSpPr>
-          <p:cNvPr id="4" name="TextBox 3"/>
-          <p:cNvSpPr txBox="1"/>
-          <p:nvPr/>
-        </p:nvSpPr>
-        <p:spPr>
-          <a:xfrm>
-            <a:off x="704088" y="8065008"/>
-            <a:ext cx="8915400" cy="228600"/>
-          </a:xfrm>
-          <a:prstGeom prst="rect">
-            <a:avLst/>
-          </a:prstGeom>
-          <a:noFill/>
-        </p:spPr>
-        <p:txBody>
-          <a:bodyPr wrap="none">
-            <a:spAutoFit/>
-          </a:bodyPr>
-          <a:lstStyle/>
-          <a:p>
-            <a:r>
-              <a:rPr sz="800">
-                <a:solidFill>
-                  <a:srgbClr val="000000"/>
-                </a:solidFill>
-              </a:rPr>
-              <a:t>Copyright © 2026 by Elephant Scale, All Rights Reserved</a:t>
-            </a:r>
-          </a:p>
-        </p:txBody>
-      </p:sp>
-    </p:spTree>
-  </p:cSld>
-  <p:clrMapOvr>
-    <a:masterClrMapping/>
-  </p:clrMapOvr>
-</p:sld>
-</file>
-
-<file path=ppt/slides/slide3.xml><?xml version="1.0" encoding="utf-8"?>
-<p:sld xmlns:a="http://schemas.openxmlformats.org/drawingml/2006/main" xmlns:p="http://schemas.openxmlformats.org/presentationml/2006/main" xmlns:r="http://schemas.openxmlformats.org/officeDocument/2006/relationships">
-  <p:cSld>
-    <p:spTree>
-      <p:nvGrpSpPr>
-        <p:cNvPr id="1" name=""/>
-        <p:cNvGrpSpPr/>
-        <p:nvPr/>
-      </p:nvGrpSpPr>
-      <p:grpSpPr/>
-      <p:sp>
-        <p:nvSpPr>
-          <p:cNvPr id="2" name="Title 1"/>
-          <p:cNvSpPr>
-            <a:spLocks noGrp="1"/>
-          </p:cNvSpPr>
-          <p:nvPr>
-            <p:ph type="title"/>
-          </p:nvPr>
-        </p:nvSpPr>
-        <p:spPr/>
-        <p:txBody>
-          <a:bodyPr/>
-          <a:lstStyle/>
-          <a:p>
-            <a:r>
-              <a:t>What a Producer Actually Does</a:t>
-            </a:r>
-          </a:p>
-        </p:txBody>
-      </p:sp>
-      <p:sp>
-        <p:nvSpPr>
-          <p:cNvPr id="3" name="Content Placeholder 2"/>
-          <p:cNvSpPr>
-            <a:spLocks noGrp="1"/>
-          </p:cNvSpPr>
-          <p:nvPr>
-            <p:ph idx="1"/>
-          </p:nvPr>
-        </p:nvSpPr>
-        <p:spPr/>
-        <p:txBody>
-          <a:bodyPr/>
-          <a:lstStyle/>
-          <a:p>
-            <a:r>
-              <a:rPr>
-                <a:latin typeface="Courier New"/>
-              </a:rPr>
-              <a:t> producer.send(...)</a:t>
-            </a:r>
-            <a:r>
-              <a:t> looks instant, but a lot happens between your call and a</a:t>
-            </a:r>
-            <a:r>
-              <a:t> durable record on a broker.</a:t>
-            </a:r>
-          </a:p>
-          <a:p/>
-          <a:p/>
-          <a:p/>
-          <a:p/>
-          <a:p/>
-          <a:p>
-            <a:r>
-              <a:t> The call is</a:t>
-            </a:r>
-            <a:r>
-              <a:rPr b="1"/>
-              <a:t> asynchronous</a:t>
-            </a:r>
-            <a:r>
-              <a:t> — it returns before the broker has the record</a:t>
-            </a:r>
-          </a:p>
-          <a:p>
-            <a:r>
-              <a:t> Understanding these stages is how you tune for</a:t>
-            </a:r>
-            <a:r>
-              <a:rPr b="1"/>
-              <a:t> throughput, latency, and durability</a:t>
-            </a:r>
-          </a:p>
-        </p:txBody>
-      </p:sp>
-      <p:sp>
-        <p:nvSpPr>
-          <p:cNvPr id="4" name="TextBox 3"/>
-          <p:cNvSpPr txBox="1"/>
-          <p:nvPr/>
-        </p:nvSpPr>
-        <p:spPr>
-          <a:xfrm>
-            <a:off x="704088" y="8065008"/>
-            <a:ext cx="8915400" cy="228600"/>
-          </a:xfrm>
-          <a:prstGeom prst="rect">
-            <a:avLst/>
-          </a:prstGeom>
-          <a:noFill/>
-        </p:spPr>
-        <p:txBody>
-          <a:bodyPr wrap="none">
-            <a:spAutoFit/>
-          </a:bodyPr>
-          <a:lstStyle/>
-          <a:p>
-            <a:r>
-              <a:rPr sz="800">
-                <a:solidFill>
-                  <a:srgbClr val="000000"/>
-                </a:solidFill>
-              </a:rPr>
-              <a:t>Copyright © 2026 by Elephant Scale, All Rights Reserved</a:t>
-            </a:r>
-          </a:p>
-        </p:txBody>
-      </p:sp>
-      <p:pic>
-        <p:nvPicPr>
-          <p:cNvPr id="5" name="Picture 4" descr="1.png"/>
-          <p:cNvPicPr>
-            <a:picLocks noChangeAspect="1"/>
-          </p:cNvPicPr>
-          <p:nvPr/>
-        </p:nvPicPr>
-        <p:blipFill>
-          <a:blip r:embed="rId2"/>
-          <a:stretch>
-            <a:fillRect/>
-          </a:stretch>
-        </p:blipFill>
-        <p:spPr>
-          <a:xfrm>
-            <a:off x="0" y="1792224"/>
-            <a:ext cx="8636000" cy="3454400"/>
-          </a:xfrm>
-          <a:prstGeom prst="rect">
-            <a:avLst/>
-          </a:prstGeom>
-        </p:spPr>
-      </p:pic>
-    </p:spTree>
-  </p:cSld>
-  <p:clrMapOvr>
-    <a:masterClrMapping/>
-  </p:clrMapOvr>
-</p:sld>
-</file>
-
-<file path=ppt/slides/slide4.xml><?xml version="1.0" encoding="utf-8"?>
-<p:sld xmlns:a="http://schemas.openxmlformats.org/drawingml/2006/main" xmlns:p="http://schemas.openxmlformats.org/presentationml/2006/main" xmlns:r="http://schemas.openxmlformats.org/officeDocument/2006/relationships">
-  <p:cSld>
-    <p:spTree>
-      <p:nvGrpSpPr>
-        <p:cNvPr id="1" name=""/>
-        <p:cNvGrpSpPr/>
-        <p:nvPr/>
-      </p:nvGrpSpPr>
-      <p:grpSpPr/>
-      <p:sp>
-        <p:nvSpPr>
-          <p:cNvPr id="2" name="Title 1"/>
-          <p:cNvSpPr>
-            <a:spLocks noGrp="1"/>
-          </p:cNvSpPr>
-          <p:nvPr>
-            <p:ph type="title"/>
-          </p:nvPr>
-        </p:nvSpPr>
-        <p:spPr/>
-        <p:txBody>
-          <a:bodyPr/>
-          <a:lstStyle/>
-          <a:p>
-            <a:r>
-              <a:t>Stage 1: Serialization</a:t>
-            </a:r>
-          </a:p>
-        </p:txBody>
-      </p:sp>
-      <p:sp>
-        <p:nvSpPr>
-          <p:cNvPr id="3" name="Content Placeholder 2"/>
-          <p:cNvSpPr>
-            <a:spLocks noGrp="1"/>
-          </p:cNvSpPr>
-          <p:nvPr>
-            <p:ph idx="1"/>
-          </p:nvPr>
-        </p:nvSpPr>
-        <p:spPr/>
-        <p:txBody>
-          <a:bodyPr/>
-          <a:lstStyle/>
-          <a:p>
-            <a:r>
-              <a:t> Kafka stores</a:t>
-            </a:r>
-            <a:r>
-              <a:rPr b="1"/>
-              <a:t> bytes</a:t>
-            </a:r>
-            <a:r>
-              <a:t> . Your keys and values must be turned into bytes on the way in.</a:t>
-            </a:r>
-          </a:p>
-          <a:p>
-            <a:r>
-              <a:t> The producer needs a</a:t>
-            </a:r>
-            <a:r>
-              <a:rPr b="1"/>
-              <a:t> serializer</a:t>
-            </a:r>
-            <a:r>
-              <a:t> for the key and one for the value</a:t>
-            </a:r>
-          </a:p>
-          <a:p>
-            <a:r>
-              <a:t> Common choices: strings, JSON, and — with the Schema Registry —</a:t>
-            </a:r>
-            <a:r>
-              <a:rPr b="1"/>
-              <a:t> Avro / Protobuf</a:t>
-            </a:r>
-            <a:r>
-              <a:t> (Module 8)</a:t>
-            </a:r>
-          </a:p>
-          <a:p>
-            <a:r>
-              <a:t> Consumers must use a</a:t>
-            </a:r>
-            <a:r>
-              <a:rPr b="1"/>
-              <a:t> matching deserializer</a:t>
-            </a:r>
-            <a:r>
-              <a:t> , or they read garbage</a:t>
-            </a:r>
-          </a:p>
-          <a:p/>
-          <a:p/>
-          <a:p/>
-          <a:p/>
-        </p:txBody>
-      </p:sp>
-      <p:sp>
-        <p:nvSpPr>
-          <p:cNvPr id="4" name="TextBox 3"/>
-          <p:cNvSpPr txBox="1"/>
-          <p:nvPr/>
-        </p:nvSpPr>
-        <p:spPr>
-          <a:xfrm>
-            <a:off x="704088" y="8065008"/>
-            <a:ext cx="8915400" cy="228600"/>
-          </a:xfrm>
-          <a:prstGeom prst="rect">
-            <a:avLst/>
-          </a:prstGeom>
-          <a:noFill/>
-        </p:spPr>
-        <p:txBody>
-          <a:bodyPr wrap="none">
-            <a:spAutoFit/>
-          </a:bodyPr>
-          <a:lstStyle/>
-          <a:p>
-            <a:r>
-              <a:rPr sz="800">
-                <a:solidFill>
-                  <a:srgbClr val="000000"/>
-                </a:solidFill>
-              </a:rPr>
-              <a:t>Copyright © 2026 by Elephant Scale, All Rights Reserved</a:t>
-            </a:r>
-          </a:p>
-        </p:txBody>
-      </p:sp>
-      <p:pic>
-        <p:nvPicPr>
-          <p:cNvPr id="5" name="Picture 4" descr="1.png"/>
-          <p:cNvPicPr>
-            <a:picLocks noChangeAspect="1"/>
-          </p:cNvPicPr>
-          <p:nvPr/>
-        </p:nvPicPr>
-        <p:blipFill>
-          <a:blip r:embed="rId2"/>
-          <a:stretch>
-            <a:fillRect/>
-          </a:stretch>
-        </p:blipFill>
-        <p:spPr>
-          <a:xfrm>
-            <a:off x="0" y="3547872"/>
-            <a:ext cx="8915400" cy="2056770"/>
-          </a:xfrm>
-          <a:prstGeom prst="rect">
-            <a:avLst/>
-          </a:prstGeom>
-        </p:spPr>
-      </p:pic>
-    </p:spTree>
-  </p:cSld>
-  <p:clrMapOvr>
-    <a:masterClrMapping/>
-  </p:clrMapOvr>
-</p:sld>
-</file>
-
-<file path=ppt/slides/slide5.xml><?xml version="1.0" encoding="utf-8"?>
-<p:sld xmlns:a="http://schemas.openxmlformats.org/drawingml/2006/main" xmlns:p="http://schemas.openxmlformats.org/presentationml/2006/main" xmlns:r="http://schemas.openxmlformats.org/officeDocument/2006/relationships">
-  <p:cSld>
-    <p:spTree>
-      <p:nvGrpSpPr>
-        <p:cNvPr id="1" name=""/>
-        <p:cNvGrpSpPr/>
-        <p:nvPr/>
-      </p:nvGrpSpPr>
-      <p:grpSpPr/>
-      <p:sp>
-        <p:nvSpPr>
-          <p:cNvPr id="2" name="Title 1"/>
-          <p:cNvSpPr>
-            <a:spLocks noGrp="1"/>
-          </p:cNvSpPr>
-          <p:nvPr>
-            <p:ph type="title"/>
-          </p:nvPr>
-        </p:nvSpPr>
-        <p:spPr/>
-        <p:txBody>
-          <a:bodyPr/>
-          <a:lstStyle/>
-          <a:p>
-            <a:r>
-              <a:t>Stage 2: The Partitioner</a:t>
-            </a:r>
-          </a:p>
-        </p:txBody>
-      </p:sp>
-      <p:sp>
-        <p:nvSpPr>
-          <p:cNvPr id="3" name="Content Placeholder 2"/>
-          <p:cNvSpPr>
-            <a:spLocks noGrp="1"/>
-          </p:cNvSpPr>
-          <p:nvPr>
-            <p:ph idx="1"/>
-          </p:nvPr>
-        </p:nvSpPr>
-        <p:spPr/>
-        <p:txBody>
-          <a:bodyPr/>
-          <a:lstStyle/>
-          <a:p>
-            <a:r>
-              <a:t> The producer must pick</a:t>
-            </a:r>
-            <a:r>
-              <a:rPr b="1"/>
-              <a:t> which partition</a:t>
-            </a:r>
-            <a:r>
-              <a:t> each record goes to. That's the</a:t>
-            </a:r>
-            <a:r>
-              <a:rPr b="1"/>
-              <a:t> partitioner</a:t>
-            </a:r>
-            <a:r>
-              <a:t> .</a:t>
-            </a:r>
-          </a:p>
-          <a:p>
-            <a:r>
-              <a:rPr b="1"/>
-              <a:t> Key present</a:t>
-            </a:r>
-            <a:r>
-              <a:t> →</a:t>
-            </a:r>
-            <a:r>
-              <a:rPr>
-                <a:latin typeface="Courier New"/>
-              </a:rPr>
-              <a:t> hash(key) % partitions</a:t>
-            </a:r>
-            <a:r>
-              <a:t> → same key always → same partition (</a:t>
-            </a:r>
-            <a:r>
-              <a:rPr b="1"/>
-              <a:t> ordering</a:t>
-            </a:r>
-            <a:r>
-              <a:t> )</a:t>
-            </a:r>
-          </a:p>
-          <a:p>
-            <a:r>
-              <a:rPr b="1"/>
-              <a:t> No key</a:t>
-            </a:r>
-            <a:r>
-              <a:t> → spread across partitions for even load (sticky batching, round-robin-ish)</a:t>
-            </a:r>
-          </a:p>
-          <a:p>
-            <a:r>
-              <a:t> You can supply a</a:t>
-            </a:r>
-            <a:r>
-              <a:rPr b="1"/>
-              <a:t> custom partitioner</a:t>
-            </a:r>
-            <a:r>
-              <a:t> for special routing, but rarely need to</a:t>
-            </a:r>
-          </a:p>
-          <a:p/>
-          <a:p/>
-          <a:p>
-            <a:r>
-              <a:rPr b="1"/>
-              <a:t> Design rule:</a:t>
-            </a:r>
-            <a:r>
-              <a:t> choose a key when you need per-entity ordering; go keyless for</a:t>
-            </a:r>
-            <a:r>
-              <a:t> maximum spread. This is the single most important producer decision.</a:t>
-            </a:r>
-          </a:p>
-        </p:txBody>
-      </p:sp>
-      <p:sp>
-        <p:nvSpPr>
-          <p:cNvPr id="4" name="TextBox 3"/>
-          <p:cNvSpPr txBox="1"/>
-          <p:nvPr/>
-        </p:nvSpPr>
-        <p:spPr>
-          <a:xfrm>
-            <a:off x="704088" y="8065008"/>
-            <a:ext cx="8915400" cy="228600"/>
-          </a:xfrm>
-          <a:prstGeom prst="rect">
-            <a:avLst/>
-          </a:prstGeom>
-          <a:noFill/>
-        </p:spPr>
-        <p:txBody>
-          <a:bodyPr wrap="none">
-            <a:spAutoFit/>
-          </a:bodyPr>
-          <a:lstStyle/>
-          <a:p>
-            <a:r>
-              <a:rPr sz="800">
-                <a:solidFill>
-                  <a:srgbClr val="000000"/>
-                </a:solidFill>
-              </a:rPr>
-              <a:t>Copyright © 2026 by Elephant Scale, All Rights Reserved</a:t>
-            </a:r>
-          </a:p>
-        </p:txBody>
-      </p:sp>
-      <p:pic>
-        <p:nvPicPr>
-          <p:cNvPr id="5" name="Picture 4" descr="1.png"/>
-          <p:cNvPicPr>
-            <a:picLocks noChangeAspect="1"/>
-          </p:cNvPicPr>
-          <p:nvPr/>
-        </p:nvPicPr>
-        <p:blipFill>
-          <a:blip r:embed="rId2"/>
-          <a:stretch>
-            <a:fillRect/>
-          </a:stretch>
-        </p:blipFill>
-        <p:spPr>
-          <a:xfrm>
-            <a:off x="0" y="3108960"/>
-            <a:ext cx="9398000" cy="1054100"/>
-          </a:xfrm>
-          <a:prstGeom prst="rect">
-            <a:avLst/>
-          </a:prstGeom>
-        </p:spPr>
-      </p:pic>
-    </p:spTree>
-  </p:cSld>
-  <p:clrMapOvr>
-    <a:masterClrMapping/>
-  </p:clrMapOvr>
-</p:sld>
-</file>
-
-<file path=ppt/slides/slide6.xml><?xml version="1.0" encoding="utf-8"?>
-<p:sld xmlns:a="http://schemas.openxmlformats.org/drawingml/2006/main" xmlns:p="http://schemas.openxmlformats.org/presentationml/2006/main" xmlns:r="http://schemas.openxmlformats.org/officeDocument/2006/relationships">
-  <p:cSld>
-    <p:spTree>
-      <p:nvGrpSpPr>
-        <p:cNvPr id="1" name=""/>
-        <p:cNvGrpSpPr/>
-        <p:nvPr/>
-      </p:nvGrpSpPr>
-      <p:grpSpPr/>
-      <p:sp>
-        <p:nvSpPr>
-          <p:cNvPr id="2" name="Title 1"/>
-          <p:cNvSpPr>
-            <a:spLocks noGrp="1"/>
-          </p:cNvSpPr>
-          <p:nvPr>
-            <p:ph type="title"/>
-          </p:nvPr>
-        </p:nvSpPr>
-        <p:spPr/>
-        <p:txBody>
-          <a:bodyPr/>
-          <a:lstStyle/>
-          <a:p>
-            <a:r>
-              <a:t>Ordering: The Guarantee and Its Limits</a:t>
-            </a:r>
-          </a:p>
-        </p:txBody>
-      </p:sp>
-      <p:sp>
-        <p:nvSpPr>
-          <p:cNvPr id="3" name="Content Placeholder 2"/>
-          <p:cNvSpPr>
-            <a:spLocks noGrp="1"/>
-          </p:cNvSpPr>
-          <p:nvPr>
-            <p:ph idx="1"/>
-          </p:nvPr>
-        </p:nvSpPr>
-        <p:spPr/>
-        <p:txBody>
-          <a:bodyPr/>
-          <a:lstStyle/>
-          <a:p>
-            <a:r>
-              <a:t> Kafka guarantees order</a:t>
-            </a:r>
-            <a:r>
-              <a:rPr b="1"/>
-              <a:t> within a partition</a:t>
-            </a:r>
-            <a:r>
-              <a:t> , never across partitions.</a:t>
-            </a:r>
-          </a:p>
-          <a:p>
-            <a:r>
-              <a:t> All records with the same key share a partition → ordered relative to each other</a:t>
-            </a:r>
-          </a:p>
-          <a:p>
-            <a:r>
-              <a:t> Records with different keys may be in different partitions →</a:t>
-            </a:r>
-            <a:r>
-              <a:rPr b="1"/>
-              <a:t> no</a:t>
-            </a:r>
-            <a:r>
-              <a:t> cross-partition order</a:t>
-            </a:r>
-          </a:p>
-          <a:p>
-            <a:r>
-              <a:t> Pick your key to match your ordering requirement (per user, per order, per device)</a:t>
-            </a:r>
-          </a:p>
-          <a:p/>
-          <a:p/>
-        </p:txBody>
-      </p:sp>
-      <p:sp>
-        <p:nvSpPr>
-          <p:cNvPr id="4" name="TextBox 3"/>
-          <p:cNvSpPr txBox="1"/>
-          <p:nvPr/>
-        </p:nvSpPr>
-        <p:spPr>
-          <a:xfrm>
-            <a:off x="704088" y="8065008"/>
-            <a:ext cx="8915400" cy="228600"/>
-          </a:xfrm>
-          <a:prstGeom prst="rect">
-            <a:avLst/>
-          </a:prstGeom>
-          <a:noFill/>
-        </p:spPr>
-        <p:txBody>
-          <a:bodyPr wrap="none">
-            <a:spAutoFit/>
-          </a:bodyPr>
-          <a:lstStyle/>
-          <a:p>
-            <a:r>
-              <a:rPr sz="800">
-                <a:solidFill>
-                  <a:srgbClr val="000000"/>
-                </a:solidFill>
-              </a:rPr>
-              <a:t>Copyright © 2026 by Elephant Scale, All Rights Reserved</a:t>
-            </a:r>
-          </a:p>
-        </p:txBody>
-      </p:sp>
-      <p:pic>
-        <p:nvPicPr>
-          <p:cNvPr id="5" name="Picture 4" descr="1.png"/>
-          <p:cNvPicPr>
-            <a:picLocks noChangeAspect="1"/>
-          </p:cNvPicPr>
-          <p:nvPr/>
-        </p:nvPicPr>
-        <p:blipFill>
-          <a:blip r:embed="rId2"/>
-          <a:stretch>
-            <a:fillRect/>
-          </a:stretch>
-        </p:blipFill>
-        <p:spPr>
-          <a:xfrm>
-            <a:off x="0" y="3986783"/>
-            <a:ext cx="9245600" cy="1054100"/>
-          </a:xfrm>
-          <a:prstGeom prst="rect">
-            <a:avLst/>
-          </a:prstGeom>
-        </p:spPr>
-      </p:pic>
-    </p:spTree>
-  </p:cSld>
-  <p:clrMapOvr>
-    <a:masterClrMapping/>
-  </p:clrMapOvr>
-</p:sld>
-</file>
-
-<file path=ppt/slides/slide7.xml><?xml version="1.0" encoding="utf-8"?>
-<p:sld xmlns:a="http://schemas.openxmlformats.org/drawingml/2006/main" xmlns:p="http://schemas.openxmlformats.org/presentationml/2006/main" xmlns:r="http://schemas.openxmlformats.org/officeDocument/2006/relationships">
-  <p:cSld>
-    <p:spTree>
-      <p:nvGrpSpPr>
-        <p:cNvPr id="1" name=""/>
-        <p:cNvGrpSpPr/>
-        <p:nvPr/>
-      </p:nvGrpSpPr>
-      <p:grpSpPr/>
-      <p:sp>
-        <p:nvSpPr>
-          <p:cNvPr id="2" name="Title 1"/>
-          <p:cNvSpPr>
-            <a:spLocks noGrp="1"/>
-          </p:cNvSpPr>
-          <p:nvPr>
-            <p:ph type="title"/>
-          </p:nvPr>
-        </p:nvSpPr>
-        <p:spPr/>
-        <p:txBody>
-          <a:bodyPr/>
-          <a:lstStyle/>
-          <a:p>
-            <a:r>
-              <a:t>Stage 3: Batching</a:t>
-            </a:r>
-          </a:p>
-        </p:txBody>
-      </p:sp>
-      <p:sp>
-        <p:nvSpPr>
-          <p:cNvPr id="3" name="Content Placeholder 2"/>
-          <p:cNvSpPr>
-            <a:spLocks noGrp="1"/>
-          </p:cNvSpPr>
-          <p:nvPr>
-            <p:ph idx="1"/>
-          </p:nvPr>
-        </p:nvSpPr>
-        <p:spPr/>
-        <p:txBody>
-          <a:bodyPr/>
-          <a:lstStyle/>
-          <a:p>
-            <a:r>
-              <a:t> The producer does</a:t>
-            </a:r>
-            <a:r>
-              <a:rPr b="1"/>
-              <a:t> not</a:t>
-            </a:r>
-            <a:r>
-              <a:t> send one record per request. It</a:t>
-            </a:r>
-            <a:r>
-              <a:rPr b="1"/>
-              <a:t> batches</a:t>
-            </a:r>
-            <a:r>
-              <a:t> records per</a:t>
-            </a:r>
-            <a:r>
-              <a:t> partition, which is where its throughput comes from.</a:t>
-            </a:r>
-          </a:p>
-          <a:p>
-            <a:r>
-              <a:t> Two knobs decide when a batch is sent:</a:t>
-            </a:r>
-          </a:p>
-          <a:p>
-            <a:r>
-              <a:rPr i="1" b="1"/>
-              <a:t> batch.size</a:t>
-            </a:r>
-          </a:p>
-          <a:p>
-            <a:r>
-              <a:t> — max bytes per batch (per partition). Full batch → send now.</a:t>
-            </a:r>
-          </a:p>
-          <a:p>
-            <a:r>
-              <a:rPr i="1" b="1"/>
-              <a:t> linger.ms</a:t>
-            </a:r>
-          </a:p>
-          <a:p>
-            <a:r>
-              <a:t> — how long to</a:t>
-            </a:r>
-            <a:r>
-              <a:rPr i="1"/>
-              <a:t> wait</a:t>
-            </a:r>
-            <a:r>
-              <a:t> for more records before sending a partial batch.</a:t>
-            </a:r>
-          </a:p>
-          <a:p/>
-          <a:p>
-            <a:r>
-              <a:rPr b="1"/>
-              <a:t> The trade-off:</a:t>
-            </a:r>
-            <a:r>
-              <a:t> a little</a:t>
-            </a:r>
-            <a:r>
-              <a:rPr>
-                <a:latin typeface="Courier New"/>
-              </a:rPr>
-              <a:t> linger.ms</a:t>
-            </a:r>
-            <a:r>
-              <a:t> dramatically improves throughput under load,</a:t>
-            </a:r>
-            <a:r>
-              <a:t> at the cost of a few ms of latency. Default</a:t>
-            </a:r>
-            <a:r>
-              <a:rPr>
-                <a:latin typeface="Courier New"/>
-              </a:rPr>
-              <a:t> linger.ms</a:t>
-            </a:r>
-            <a:r>
-              <a:t> is small; raise it to batch harder.</a:t>
-            </a:r>
-          </a:p>
-        </p:txBody>
-      </p:sp>
-      <p:sp>
-        <p:nvSpPr>
-          <p:cNvPr id="4" name="TextBox 3"/>
-          <p:cNvSpPr txBox="1"/>
-          <p:nvPr/>
-        </p:nvSpPr>
-        <p:spPr>
-          <a:xfrm>
-            <a:off x="704088" y="8065008"/>
-            <a:ext cx="8915400" cy="228600"/>
-          </a:xfrm>
-          <a:prstGeom prst="rect">
-            <a:avLst/>
-          </a:prstGeom>
-          <a:noFill/>
-        </p:spPr>
-        <p:txBody>
-          <a:bodyPr wrap="none">
-            <a:spAutoFit/>
-          </a:bodyPr>
-          <a:lstStyle/>
-          <a:p>
-            <a:r>
-              <a:rPr sz="800">
-                <a:solidFill>
-                  <a:srgbClr val="000000"/>
-                </a:solidFill>
-              </a:rPr>
-              <a:t>Copyright © 2026 by Elephant Scale, All Rights Reserved</a:t>
-            </a:r>
-          </a:p>
-        </p:txBody>
-      </p:sp>
-      <p:pic>
-        <p:nvPicPr>
-          <p:cNvPr id="5" name="Picture 4" descr="1.png"/>
-          <p:cNvPicPr>
-            <a:picLocks noChangeAspect="1"/>
-          </p:cNvPicPr>
-          <p:nvPr/>
-        </p:nvPicPr>
-        <p:blipFill>
-          <a:blip r:embed="rId2"/>
-          <a:stretch>
-            <a:fillRect/>
-          </a:stretch>
-        </p:blipFill>
-        <p:spPr>
-          <a:xfrm>
-            <a:off x="0" y="3986783"/>
+            <a:off x="30587" y="5368131"/>
             <a:ext cx="8915400" cy="564036"/>
           </a:xfrm>
           <a:prstGeom prst="rect">
@@ -5255,7 +5503,7 @@
 </file>
 
 <file path=ppt/slides/slide8.xml><?xml version="1.0" encoding="utf-8"?>
-<p:sld xmlns:a="http://schemas.openxmlformats.org/drawingml/2006/main" xmlns:p="http://schemas.openxmlformats.org/presentationml/2006/main" xmlns:r="http://schemas.openxmlformats.org/officeDocument/2006/relationships">
+<p:sld xmlns:a="http://schemas.openxmlformats.org/drawingml/2006/main" xmlns:r="http://schemas.openxmlformats.org/officeDocument/2006/relationships" xmlns:p="http://schemas.openxmlformats.org/presentationml/2006/main">
   <p:cSld>
     <p:spTree>
       <p:nvGrpSpPr>
@@ -5263,7 +5511,14 @@
         <p:cNvGrpSpPr/>
         <p:nvPr/>
       </p:nvGrpSpPr>
-      <p:grpSpPr/>
+      <p:grpSpPr>
+        <a:xfrm>
+          <a:off x="0" y="0"/>
+          <a:ext cx="0" cy="0"/>
+          <a:chOff x="0" y="0"/>
+          <a:chExt cx="0" cy="0"/>
+        </a:xfrm>
+      </p:grpSpPr>
       <p:sp>
         <p:nvSpPr>
           <p:cNvPr id="2" name="Title 1"/>
@@ -5308,10 +5563,7 @@
               <a:t> compressed</a:t>
             </a:r>
             <a:r>
-              <a:t> before they hit the network and disk — a big win because</a:t>
-            </a:r>
-            <a:r>
-              <a:t> Kafka compresses the whole batch, not record-by-record.</a:t>
+              <a:t> before they hit the network and disk — a big win because Kafka compresses the whole batch, not record-by-record.</a:t>
             </a:r>
           </a:p>
           <a:p>
@@ -5369,7 +5621,7 @@
           </a:p>
           <a:p>
             <a:r>
-              <a:rPr i="1" b="1"/>
+              <a:rPr b="1" i="1"/>
               <a:t> zstd</a:t>
             </a:r>
           </a:p>
@@ -5380,7 +5632,7 @@
           </a:p>
           <a:p>
             <a:r>
-              <a:rPr i="1" b="1"/>
+              <a:rPr b="1" i="1"/>
               <a:t> lz4</a:t>
             </a:r>
             <a:r>
@@ -5401,8 +5653,12 @@
               <a:t> The broker stores it compressed; the consumer decompresses — end to end</a:t>
             </a:r>
           </a:p>
-          <a:p/>
-          <a:p/>
+          <a:p>
+            <a:endParaRPr/>
+          </a:p>
+          <a:p>
+            <a:endParaRPr/>
+          </a:p>
         </p:txBody>
       </p:sp>
       <p:sp>
@@ -5447,14 +5703,14 @@
           <p:nvPr/>
         </p:nvPicPr>
         <p:blipFill>
-          <a:blip r:embed="rId2"/>
+          <a:blip r:embed="rId3"/>
           <a:stretch>
             <a:fillRect/>
           </a:stretch>
         </p:blipFill>
         <p:spPr>
           <a:xfrm>
-            <a:off x="0" y="4864608"/>
+            <a:off x="0" y="6248787"/>
             <a:ext cx="8940800" cy="1054100"/>
           </a:xfrm>
           <a:prstGeom prst="rect">
@@ -5471,7 +5727,7 @@
 </file>
 
 <file path=ppt/slides/slide9.xml><?xml version="1.0" encoding="utf-8"?>
-<p:sld xmlns:a="http://schemas.openxmlformats.org/drawingml/2006/main" xmlns:p="http://schemas.openxmlformats.org/presentationml/2006/main" xmlns:r="http://schemas.openxmlformats.org/officeDocument/2006/relationships">
+<p:sld xmlns:a="http://schemas.openxmlformats.org/drawingml/2006/main" xmlns:r="http://schemas.openxmlformats.org/officeDocument/2006/relationships" xmlns:p="http://schemas.openxmlformats.org/presentationml/2006/main">
   <p:cSld>
     <p:spTree>
       <p:nvGrpSpPr>
@@ -5479,7 +5735,14 @@
         <p:cNvGrpSpPr/>
         <p:nvPr/>
       </p:nvGrpSpPr>
-      <p:grpSpPr/>
+      <p:grpSpPr>
+        <a:xfrm>
+          <a:off x="0" y="0"/>
+          <a:ext cx="0" cy="0"/>
+          <a:chOff x="0" y="0"/>
+          <a:chExt cx="0" cy="0"/>
+        </a:xfrm>
+      </p:grpSpPr>
       <p:sp>
         <p:nvSpPr>
           <p:cNvPr id="2" name="Title 1"/>
@@ -5522,20 +5785,34 @@
           </a:p>
           <a:p>
             <a:r>
-              <a:rPr i="1" b="1"/>
+              <a:rPr b="1" i="1"/>
               <a:t> acks</a:t>
             </a:r>
             <a:r>
               <a:t> — the durability dial.</a:t>
             </a:r>
           </a:p>
-          <a:p/>
-          <a:p/>
-          <a:p/>
-          <a:p/>
-          <a:p/>
-          <a:p/>
-          <a:p/>
+          <a:p>
+            <a:endParaRPr/>
+          </a:p>
+          <a:p>
+            <a:endParaRPr/>
+          </a:p>
+          <a:p>
+            <a:endParaRPr/>
+          </a:p>
+          <a:p>
+            <a:endParaRPr/>
+          </a:p>
+          <a:p>
+            <a:endParaRPr/>
+          </a:p>
+          <a:p>
+            <a:endParaRPr/>
+          </a:p>
+          <a:p>
+            <a:endParaRPr/>
+          </a:p>
           <a:p>
             <a:r>
               <a:rPr b="1"/>
@@ -5583,11 +5860,17 @@
           <p:cNvGraphicFramePr>
             <a:graphicFrameLocks noGrp="1"/>
           </p:cNvGraphicFramePr>
-          <p:nvPr/>
+          <p:nvPr>
+            <p:extLst>
+              <p:ext uri="{D42A27DB-BD31-4B8C-83A1-F6EECF244321}">
+                <p14:modId xmlns:p14="http://schemas.microsoft.com/office/powerpoint/2010/main" val="1761871855"/>
+              </p:ext>
+            </p:extLst>
+          </p:nvPr>
         </p:nvGraphicFramePr>
         <p:xfrm>
-          <a:off x="237744" y="1792224"/>
-          <a:ext cx="8915400" cy="1828800"/>
+          <a:off x="237744" y="2041144"/>
+          <a:ext cx="8915400" cy="2651760"/>
         </p:xfrm>
         <a:graphic>
           <a:graphicData uri="http://schemas.openxmlformats.org/drawingml/2006/table">
@@ -5596,10 +5879,34 @@
                 <a:tableStyleId>{5C22544A-7EE6-4342-B048-85BDC9FD1C3A}</a:tableStyleId>
               </a:tblPr>
               <a:tblGrid>
-                <a:gridCol w="2228850"/>
-                <a:gridCol w="2228850"/>
-                <a:gridCol w="2228850"/>
-                <a:gridCol w="2228850"/>
+                <a:gridCol w="2228850">
+                  <a:extLst>
+                    <a:ext uri="{9D8B030D-6E8A-4147-A177-3AD203B41FA5}">
+                      <a16:colId xmlns:a16="http://schemas.microsoft.com/office/drawing/2014/main" val="20000"/>
+                    </a:ext>
+                  </a:extLst>
+                </a:gridCol>
+                <a:gridCol w="2228850">
+                  <a:extLst>
+                    <a:ext uri="{9D8B030D-6E8A-4147-A177-3AD203B41FA5}">
+                      <a16:colId xmlns:a16="http://schemas.microsoft.com/office/drawing/2014/main" val="20001"/>
+                    </a:ext>
+                  </a:extLst>
+                </a:gridCol>
+                <a:gridCol w="2228850">
+                  <a:extLst>
+                    <a:ext uri="{9D8B030D-6E8A-4147-A177-3AD203B41FA5}">
+                      <a16:colId xmlns:a16="http://schemas.microsoft.com/office/drawing/2014/main" val="20002"/>
+                    </a:ext>
+                  </a:extLst>
+                </a:gridCol>
+                <a:gridCol w="2228850">
+                  <a:extLst>
+                    <a:ext uri="{9D8B030D-6E8A-4147-A177-3AD203B41FA5}">
+                      <a16:colId xmlns:a16="http://schemas.microsoft.com/office/drawing/2014/main" val="20003"/>
+                    </a:ext>
+                  </a:extLst>
+                </a:gridCol>
               </a:tblGrid>
               <a:tr h="457200">
                 <a:tc>
@@ -5607,9 +5914,7 @@
                     <a:bodyPr/>
                     <a:lstStyle/>
                     <a:p>
-                      <a:r>
-                        <a:t/>
-                      </a:r>
+                      <a:endParaRPr/>
                     </a:p>
                   </a:txBody>
                   <a:tcPr/>
@@ -5650,6 +5955,11 @@
                   </a:txBody>
                   <a:tcPr/>
                 </a:tc>
+                <a:extLst>
+                  <a:ext uri="{0D108BD9-81ED-4DB2-BD59-A6C34878D82A}">
+                    <a16:rowId xmlns:a16="http://schemas.microsoft.com/office/drawing/2014/main" val="10000"/>
+                  </a:ext>
+                </a:extLst>
               </a:tr>
               <a:tr h="457200">
                 <a:tc>
@@ -5703,6 +6013,11 @@
                   </a:txBody>
                   <a:tcPr/>
                 </a:tc>
+                <a:extLst>
+                  <a:ext uri="{0D108BD9-81ED-4DB2-BD59-A6C34878D82A}">
+                    <a16:rowId xmlns:a16="http://schemas.microsoft.com/office/drawing/2014/main" val="10001"/>
+                  </a:ext>
+                </a:extLst>
               </a:tr>
               <a:tr h="457200">
                 <a:tc>
@@ -5756,6 +6071,11 @@
                   </a:txBody>
                   <a:tcPr/>
                 </a:tc>
+                <a:extLst>
+                  <a:ext uri="{0D108BD9-81ED-4DB2-BD59-A6C34878D82A}">
+                    <a16:rowId xmlns:a16="http://schemas.microsoft.com/office/drawing/2014/main" val="10002"/>
+                  </a:ext>
+                </a:extLst>
               </a:tr>
               <a:tr h="457200">
                 <a:tc>
@@ -5785,9 +6105,6 @@
                         <a:rPr b="1"/>
                         <a:t>+ all in-sync replicas</a:t>
                       </a:r>
-                      <a:r>
-                        <a:t/>
-                      </a:r>
                     </a:p>
                   </a:txBody>
                   <a:tcPr/>
@@ -5810,12 +6127,18 @@
                     <a:lstStyle/>
                     <a:p>
                       <a:r>
+                        <a:rPr dirty="0"/>
                         <a:t>none once acknowledged</a:t>
                       </a:r>
                     </a:p>
                   </a:txBody>
                   <a:tcPr/>
                 </a:tc>
+                <a:extLst>
+                  <a:ext uri="{0D108BD9-81ED-4DB2-BD59-A6C34878D82A}">
+                    <a16:rowId xmlns:a16="http://schemas.microsoft.com/office/drawing/2014/main" val="10003"/>
+                  </a:ext>
+                </a:extLst>
               </a:tr>
             </a:tbl>
           </a:graphicData>
@@ -5837,8 +6160,8 @@
         </p:blipFill>
         <p:spPr>
           <a:xfrm>
-            <a:off x="0" y="3986783"/>
-            <a:ext cx="11684000" cy="1054100"/>
+            <a:off x="31661" y="5836668"/>
+            <a:ext cx="9261507" cy="835549"/>
           </a:xfrm>
           <a:prstGeom prst="rect">
             <a:avLst/>
